--- a/Topic_A/Exam_Practice/AT-A-L04_Speaking_Workshop_Food_and_Drink_Meals_and_Preferences.pptx
+++ b/Topic_A/Exam_Practice/AT-A-L04_Speaking_Workshop_Food_and_Drink_Meals_and_Preferences.pptx
@@ -615,7 +615,11 @@
           <a:lstStyle/>
           <a:p>
             <a:r>
-              <a:rPr lang="en-US" dirty="0"/>
+              <a:rPr lang="ar-SA" dirty="0">
+                <a:latin typeface="Amiri" pitchFamily="2" charset="-78"/>
+                <a:ea typeface="Amiri" pitchFamily="2" charset="-78"/>
+                <a:cs typeface="Amiri" pitchFamily="2" charset="-78"/>
+              </a:rPr>
               <a:t>ROLE PLAY C (Develop) — with your exchange partner.
 SET-UP IN THE BREAKOUT ROOM: A = examiner (reads the left column ONLY — the questions, in order), B = candidate (sees the task column; Core may use the help column), C = observer (ticks the feedback checklist). 1 minute preparation, about 3 minutes speaking, 1 minute feedback, then rotate.
 Task ! is the unexpected question: in the exam the candidate has not seen it — the examiner should read it without warning.
@@ -707,7 +711,11 @@
           <a:lstStyle/>
           <a:p>
             <a:r>
-              <a:rPr lang="en-US" dirty="0"/>
+              <a:rPr lang="ar-SA" dirty="0">
+                <a:latin typeface="Amiri" pitchFamily="2" charset="-78"/>
+                <a:ea typeface="Amiri" pitchFamily="2" charset="-78"/>
+                <a:cs typeface="Amiri" pitchFamily="2" charset="-78"/>
+              </a:rPr>
               <a:t>ROLE PLAY D (Stretch) — a radio programme about food and culture.
 SET-UP IN THE BREAKOUT ROOM: A = examiner (reads the left column ONLY — the questions, in order), B = candidate (sees the task column; Core may use the help column), C = observer (ticks the feedback checklist). 1 minute preparation, about 3 minutes speaking, 1 minute feedback, then rotate.
 Task ! is the unexpected question: in the exam the candidate has not seen it — the examiner should read it without warning.
@@ -1243,7 +1251,11 @@
           <a:lstStyle/>
           <a:p>
             <a:r>
-              <a:rPr lang="en-US" dirty="0"/>
+              <a:rPr lang="ar-SA" dirty="0">
+                <a:latin typeface="Amiri" pitchFamily="2" charset="-78"/>
+                <a:ea typeface="Amiri" pitchFamily="2" charset="-78"/>
+                <a:cs typeface="Amiri" pitchFamily="2" charset="-78"/>
+              </a:rPr>
               <a:t>TOPIC CONVERSATION — Core. Examiner asks the questions in order and may add “لِمَاذَا؟ / هَلْ يُمْكِنُ أَنْ تَشْرَحَ أَكْثَرَ؟” to push for more. Candidate aims for one full sentence per question.
 </a:t>
             </a:r>
@@ -1332,7 +1344,11 @@
           <a:lstStyle/>
           <a:p>
             <a:r>
-              <a:rPr lang="en-US" dirty="0"/>
+              <a:rPr lang="ar-SA" dirty="0">
+                <a:latin typeface="Amiri" pitchFamily="2" charset="-78"/>
+                <a:ea typeface="Amiri" pitchFamily="2" charset="-78"/>
+                <a:cs typeface="Amiri" pitchFamily="2" charset="-78"/>
+              </a:rPr>
               <a:t>TOPIC CONVERSATION — Develop. Examiner asks the questions in order and may add “لِمَاذَا؟ / هَلْ يُمْكِنُ أَنْ تَشْرَحَ أَكْثَرَ؟” to push for more. Candidate aims for two or three sentences, with a reason and some detail.
 </a:t>
             </a:r>
@@ -1421,7 +1437,11 @@
           <a:lstStyle/>
           <a:p>
             <a:r>
-              <a:rPr lang="en-US" dirty="0"/>
+              <a:rPr lang="ar-SA" dirty="0">
+                <a:latin typeface="Amiri" pitchFamily="2" charset="-78"/>
+                <a:ea typeface="Amiri" pitchFamily="2" charset="-78"/>
+                <a:cs typeface="Amiri" pitchFamily="2" charset="-78"/>
+              </a:rPr>
               <a:t>TOPIC CONVERSATION — Stretch. Examiner asks the questions in order and may add “لِمَاذَا؟ / هَلْ يُمْكِنُ أَنْ تَشْرَحَ أَكْثَرَ؟” to push for more. Candidate aims for a developed answer: opinion, comparison, example and more than one time frame.
 </a:t>
             </a:r>
@@ -1510,7 +1530,11 @@
           <a:lstStyle/>
           <a:p>
             <a:r>
-              <a:rPr lang="en-US" dirty="0"/>
+              <a:rPr lang="ar-SA" dirty="0">
+                <a:latin typeface="Amiri" pitchFamily="2" charset="-78"/>
+                <a:ea typeface="Amiri" pitchFamily="2" charset="-78"/>
+                <a:cs typeface="Amiri" pitchFamily="2" charset="-78"/>
+              </a:rPr>
               <a:t>WELCOME (1 min) — while students join.
 • Greet each student by name as they arrive: السَّلَامُ عَلَيْكُمْ. Take the register (Pastoral Tracker: attendance 0/1).
 • 2-MINUTE CHECK-IN (SEND training): a private chat to any student who seemed unsettled last lesson — “Are you okay today? 👍 / 👎”.
@@ -2224,7 +2248,11 @@
           <a:lstStyle/>
           <a:p>
             <a:r>
-              <a:rPr lang="en-US" dirty="0"/>
+              <a:rPr lang="ar-SA" dirty="0">
+                <a:latin typeface="Amiri" pitchFamily="2" charset="-78"/>
+                <a:ea typeface="Amiri" pitchFamily="2" charset="-78"/>
+                <a:cs typeface="Amiri" pitchFamily="2" charset="-78"/>
+              </a:rPr>
               <a:t>TEACH (3 min). Role play = precise and complete; conversation = develop. Choral repetition of the repair phrases. To a girl: تُعِيدِي.</a:t>
             </a:r>
             <a:endParaRPr lang="en-US" dirty="0"/>
@@ -2312,7 +2340,11 @@
           <a:lstStyle/>
           <a:p>
             <a:r>
-              <a:rPr lang="en-US" dirty="0"/>
+              <a:rPr lang="ar-SA" dirty="0">
+                <a:latin typeface="Amiri" pitchFamily="2" charset="-78"/>
+                <a:ea typeface="Amiri" pitchFamily="2" charset="-78"/>
+                <a:cs typeface="Amiri" pitchFamily="2" charset="-78"/>
+              </a:rPr>
               <a:t>LANGUAGE BANK (2 min) — four persons for each verb (آكُلُ → تَأْكُلُ). Plurals: وَجْبَةٌ → وَجَبَاتٌ (sound), طَبَقٌ → أَطْبَاقٌ (broken).</a:t>
             </a:r>
             <a:endParaRPr lang="en-US" dirty="0"/>
@@ -2400,7 +2432,11 @@
           <a:lstStyle/>
           <a:p>
             <a:r>
-              <a:rPr lang="en-US" dirty="0"/>
+              <a:rPr lang="ar-SA" dirty="0">
+                <a:latin typeface="Amiri" pitchFamily="2" charset="-78"/>
+                <a:ea typeface="Amiri" pitchFamily="2" charset="-78"/>
+                <a:cs typeface="Amiri" pitchFamily="2" charset="-78"/>
+              </a:rPr>
               <a:t>LANGUAGE BANK (2 min) — adjectives agree: طَبَقٌ لَذِيذٌ / وَجْبَةٌ لَذِيذَةٌ; non-human plurals take the feminine singular: أَطْبَاقٌ لَذِيذَةٌ. Idāfa: عَصِيرُ البُرْتُقَالِ (no “al” on the first word).</a:t>
             </a:r>
             <a:endParaRPr lang="en-US" dirty="0"/>
@@ -2576,7 +2612,11 @@
           <a:lstStyle/>
           <a:p>
             <a:r>
-              <a:rPr lang="en-US" dirty="0"/>
+              <a:rPr lang="ar-SA" dirty="0">
+                <a:latin typeface="Amiri" pitchFamily="2" charset="-78"/>
+                <a:ea typeface="Amiri" pitchFamily="2" charset="-78"/>
+                <a:cs typeface="Amiri" pitchFamily="2" charset="-78"/>
+              </a:rPr>
               <a:t>ROLE PLAY A (Core) — dinner at a friend’s house.
 SET-UP IN THE BREAKOUT ROOM: A = examiner (reads the left column ONLY — the questions, in order), B = candidate (sees the task column; Core may use the help column), C = observer (ticks the feedback checklist). 1 minute preparation, about 3 minutes speaking, 1 minute feedback, then rotate.
 Task ! is the unexpected question: in the exam the candidate has not seen it — the examiner should read it without warning.
@@ -2668,7 +2708,11 @@
           <a:lstStyle/>
           <a:p>
             <a:r>
-              <a:rPr lang="en-US" dirty="0"/>
+              <a:rPr lang="ar-SA" dirty="0">
+                <a:latin typeface="Amiri" pitchFamily="2" charset="-78"/>
+                <a:ea typeface="Amiri" pitchFamily="2" charset="-78"/>
+                <a:cs typeface="Amiri" pitchFamily="2" charset="-78"/>
+              </a:rPr>
               <a:t>ROLE PLAY B (Core+) — a survey about the school canteen.
 SET-UP IN THE BREAKOUT ROOM: A = examiner (reads the left column ONLY — the questions, in order), B = candidate (sees the task column; Core may use the help column), C = observer (ticks the feedback checklist). 1 minute preparation, about 3 minutes speaking, 1 minute feedback, then rotate.
 Task ! is the unexpected question: in the exam the candidate has not seen it — the examiner should read it without warning.
@@ -3156,6 +3200,7 @@
                   <a:srgbClr val="D4AF37"/>
                 </a:solidFill>
                 <a:latin typeface="Amiri" pitchFamily="2" charset="-78"/>
+                <a:ea typeface="Amiri" pitchFamily="2" charset="-78"/>
                 <a:cs typeface="Amiri" pitchFamily="2" charset="-78"/>
               </a:rPr>
               <a:t>م</a:t>
@@ -3362,6 +3407,7 @@
                   <a:srgbClr val="D4AF37"/>
                 </a:solidFill>
                 <a:latin typeface="Amiri" pitchFamily="2" charset="-78"/>
+                <a:ea typeface="Amiri" pitchFamily="2" charset="-78"/>
                 <a:cs typeface="Amiri" pitchFamily="2" charset="-78"/>
               </a:rPr>
               <a:t>وَرْشَةُ التَّحَدُّثِ — الطَّعَامُ وَالشَّرَابُ</a:t>
@@ -3819,6 +3865,7 @@
                   <a:srgbClr val="D4AF37"/>
                 </a:solidFill>
                 <a:latin typeface="Amiri" pitchFamily="2" charset="-78"/>
+                <a:ea typeface="Amiri" pitchFamily="2" charset="-78"/>
                 <a:cs typeface="Amiri" pitchFamily="2" charset="-78"/>
               </a:rPr>
               <a:t>م</a:t>
@@ -4139,6 +4186,7 @@
                   <a:srgbClr val="8A6D1E"/>
                 </a:solidFill>
                 <a:latin typeface="Amiri" pitchFamily="2" charset="-78"/>
+                <a:ea typeface="Amiri" pitchFamily="2" charset="-78"/>
                 <a:cs typeface="Amiri" pitchFamily="2" charset="-78"/>
               </a:rPr>
               <a:t>الطَّعَامُ فِي بَيْتِي</a:t>
@@ -4419,6 +4467,7 @@
                   <a:srgbClr val="1B3B6F"/>
                 </a:solidFill>
                 <a:latin typeface="Amiri" pitchFamily="2" charset="-78"/>
+                <a:ea typeface="Amiri" pitchFamily="2" charset="-78"/>
                 <a:cs typeface="Amiri" pitchFamily="2" charset="-78"/>
               </a:rPr>
               <a:t>ثَلَاثَ وَجَبَاتٍ: الفُطُورَ فِي …</a:t>
@@ -4495,6 +4544,7 @@
                   <a:srgbClr val="1B3B6F"/>
                 </a:solidFill>
                 <a:latin typeface="Amiri" pitchFamily="2" charset="-78"/>
+                <a:ea typeface="Amiri" pitchFamily="2" charset="-78"/>
                 <a:cs typeface="Amiri" pitchFamily="2" charset="-78"/>
               </a:rPr>
               <a:t>كَمْ وَجْبَةً تَتَنَاوَلُ فِي اليَوْمِ؟ وَمَتَى؟</a:t>
@@ -4598,6 +4648,7 @@
                   <a:srgbClr val="1B3B6F"/>
                 </a:solidFill>
                 <a:latin typeface="Amiri" pitchFamily="2" charset="-78"/>
+                <a:ea typeface="Amiri" pitchFamily="2" charset="-78"/>
                 <a:cs typeface="Amiri" pitchFamily="2" charset="-78"/>
               </a:rPr>
               <a:t>الطَّبَقُ المُفَضَّلُ … لِأَنَّ …</a:t>
@@ -4674,6 +4725,7 @@
                   <a:srgbClr val="1B3B6F"/>
                 </a:solidFill>
                 <a:latin typeface="Amiri" pitchFamily="2" charset="-78"/>
+                <a:ea typeface="Amiri" pitchFamily="2" charset="-78"/>
                 <a:cs typeface="Amiri" pitchFamily="2" charset="-78"/>
               </a:rPr>
               <a:t>مَا الطَّبَقُ المُفَضَّلُ فِي أُسْرَتِكَ؟</a:t>
@@ -4777,6 +4829,7 @@
                   <a:srgbClr val="1B3B6F"/>
                 </a:solidFill>
                 <a:latin typeface="Amiri" pitchFamily="2" charset="-78"/>
+                <a:ea typeface="Amiri" pitchFamily="2" charset="-78"/>
                 <a:cs typeface="Amiri" pitchFamily="2" charset="-78"/>
               </a:rPr>
               <a:t>أُسَاعِدُ … أَغْسِلُ … وَأُحَضِّرُ …</a:t>
@@ -4853,6 +4906,7 @@
                   <a:srgbClr val="1B3B6F"/>
                 </a:solidFill>
                 <a:latin typeface="Amiri" pitchFamily="2" charset="-78"/>
+                <a:ea typeface="Amiri" pitchFamily="2" charset="-78"/>
                 <a:cs typeface="Amiri" pitchFamily="2" charset="-78"/>
               </a:rPr>
               <a:t>هَلْ تُسَاعِدُ فِي المَطْبَخِ؟</a:t>
@@ -4956,6 +5010,7 @@
                   <a:srgbClr val="1B3B6F"/>
                 </a:solidFill>
                 <a:latin typeface="Amiri" pitchFamily="2" charset="-78"/>
+                <a:ea typeface="Amiri" pitchFamily="2" charset="-78"/>
                 <a:cs typeface="Amiri" pitchFamily="2" charset="-78"/>
               </a:rPr>
               <a:t>مَا الأَكْلَةُ المَشْهُورَةُ …؟</a:t>
@@ -5032,6 +5087,7 @@
                   <a:srgbClr val="1B3B6F"/>
                 </a:solidFill>
                 <a:latin typeface="Amiri" pitchFamily="2" charset="-78"/>
+                <a:ea typeface="Amiri" pitchFamily="2" charset="-78"/>
                 <a:cs typeface="Amiri" pitchFamily="2" charset="-78"/>
               </a:rPr>
               <a:t>… المَنْسَفُ: لَحْمٌ مَعَ أُرْزٍ وَلَبَنٍ.</a:t>
@@ -5135,6 +5191,7 @@
                   <a:srgbClr val="1B3B6F"/>
                 </a:solidFill>
                 <a:latin typeface="Amiri" pitchFamily="2" charset="-78"/>
+                <a:ea typeface="Amiri" pitchFamily="2" charset="-78"/>
                 <a:cs typeface="Amiri" pitchFamily="2" charset="-78"/>
               </a:rPr>
               <a:t>لَا أُحِبُّ … لِأَنَّ …</a:t>
@@ -5211,6 +5268,7 @@
                   <a:srgbClr val="1B3B6F"/>
                 </a:solidFill>
                 <a:latin typeface="Amiri" pitchFamily="2" charset="-78"/>
+                <a:ea typeface="Amiri" pitchFamily="2" charset="-78"/>
                 <a:cs typeface="Amiri" pitchFamily="2" charset="-78"/>
               </a:rPr>
               <a:t>مَا الطَّعَامُ الَّذِي لَا تُحِبُّهُ؟ لِمَاذَا؟</a:t>
@@ -5420,6 +5478,7 @@
                   <a:srgbClr val="D4AF37"/>
                 </a:solidFill>
                 <a:latin typeface="Amiri" pitchFamily="2" charset="-78"/>
+                <a:ea typeface="Amiri" pitchFamily="2" charset="-78"/>
                 <a:cs typeface="Amiri" pitchFamily="2" charset="-78"/>
               </a:rPr>
               <a:t>م</a:t>
@@ -5740,6 +5799,7 @@
                   <a:srgbClr val="8A6D1E"/>
                 </a:solidFill>
                 <a:latin typeface="Amiri" pitchFamily="2" charset="-78"/>
+                <a:ea typeface="Amiri" pitchFamily="2" charset="-78"/>
                 <a:cs typeface="Amiri" pitchFamily="2" charset="-78"/>
               </a:rPr>
               <a:t>الطَّعَامُ وَالثَّقَافَةُ</a:t>
@@ -6020,6 +6080,7 @@
                   <a:srgbClr val="1B3B6F"/>
                 </a:solidFill>
                 <a:latin typeface="Amiri" pitchFamily="2" charset="-78"/>
+                <a:ea typeface="Amiri" pitchFamily="2" charset="-78"/>
                 <a:cs typeface="Amiri" pitchFamily="2" charset="-78"/>
               </a:rPr>
               <a:t>نُفَضِّلُ … عَلَى …</a:t>
@@ -6096,6 +6157,7 @@
                   <a:srgbClr val="1B3B6F"/>
                 </a:solidFill>
                 <a:latin typeface="Amiri" pitchFamily="2" charset="-78"/>
+                <a:ea typeface="Amiri" pitchFamily="2" charset="-78"/>
                 <a:cs typeface="Amiri" pitchFamily="2" charset="-78"/>
               </a:rPr>
               <a:t>صِفْ عَادَاتِ أُسْرَتِكَ فِي الطَّعَامِ.</a:t>
@@ -6199,6 +6261,7 @@
                   <a:srgbClr val="1B3B6F"/>
                 </a:solidFill>
                 <a:latin typeface="Amiri" pitchFamily="2" charset="-78"/>
+                <a:ea typeface="Amiri" pitchFamily="2" charset="-78"/>
                 <a:cs typeface="Amiri" pitchFamily="2" charset="-78"/>
               </a:rPr>
               <a:t>فِي … أَكَلْنَا … وَحَضَّرَتْ …</a:t>
@@ -6275,6 +6338,7 @@
                   <a:srgbClr val="1B3B6F"/>
                 </a:solidFill>
                 <a:latin typeface="Amiri" pitchFamily="2" charset="-78"/>
+                <a:ea typeface="Amiri" pitchFamily="2" charset="-78"/>
                 <a:cs typeface="Amiri" pitchFamily="2" charset="-78"/>
               </a:rPr>
               <a:t>مَاذَا أَكَلْتُمْ فِي آخِرِ مُنَاسَبَةٍ عَائِلِيَّةٍ؟</a:t>
@@ -6378,6 +6442,7 @@
                   <a:srgbClr val="1B3B6F"/>
                 </a:solidFill>
                 <a:latin typeface="Amiri" pitchFamily="2" charset="-78"/>
+                <a:ea typeface="Amiri" pitchFamily="2" charset="-78"/>
                 <a:cs typeface="Amiri" pitchFamily="2" charset="-78"/>
               </a:rPr>
               <a:t>أُفَضِّلُ … لِأَنَّهُ … لٰكِنِّي …</a:t>
@@ -6454,6 +6519,7 @@
                   <a:srgbClr val="1B3B6F"/>
                 </a:solidFill>
                 <a:latin typeface="Amiri" pitchFamily="2" charset="-78"/>
+                <a:ea typeface="Amiri" pitchFamily="2" charset="-78"/>
                 <a:cs typeface="Amiri" pitchFamily="2" charset="-78"/>
               </a:rPr>
               <a:t>هَلْ تُفَضِّلُ الطَّعَامَ التَّقْلِيدِيَّ أَمِ الحَدِيثَ؟ لِمَاذَا؟</a:t>
@@ -6557,6 +6623,7 @@
                   <a:srgbClr val="1B3B6F"/>
                 </a:solidFill>
                 <a:latin typeface="Amiri" pitchFamily="2" charset="-78"/>
+                <a:ea typeface="Amiri" pitchFamily="2" charset="-78"/>
                 <a:cs typeface="Amiri" pitchFamily="2" charset="-78"/>
               </a:rPr>
               <a:t>بَيْنَمَا … يُفَضِّلُ …</a:t>
@@ -6633,6 +6700,7 @@
                   <a:srgbClr val="1B3B6F"/>
                 </a:solidFill>
                 <a:latin typeface="Amiri" pitchFamily="2" charset="-78"/>
+                <a:ea typeface="Amiri" pitchFamily="2" charset="-78"/>
                 <a:cs typeface="Amiri" pitchFamily="2" charset="-78"/>
               </a:rPr>
               <a:t>قَارِنْ بَيْنَ الطَّعَامِ فِي بَلَدَيْنِ تَعْرِفُهُمَا.</a:t>
@@ -6736,6 +6804,7 @@
                   <a:srgbClr val="1B3B6F"/>
                 </a:solidFill>
                 <a:latin typeface="Amiri" pitchFamily="2" charset="-78"/>
+                <a:ea typeface="Amiri" pitchFamily="2" charset="-78"/>
                 <a:cs typeface="Amiri" pitchFamily="2" charset="-78"/>
               </a:rPr>
               <a:t>لَوْ كُنْتُ طَبَّاخًا، لَحَضَّرْتُ …</a:t>
@@ -6812,6 +6881,7 @@
                   <a:srgbClr val="1B3B6F"/>
                 </a:solidFill>
                 <a:latin typeface="Amiri" pitchFamily="2" charset="-78"/>
+                <a:ea typeface="Amiri" pitchFamily="2" charset="-78"/>
                 <a:cs typeface="Amiri" pitchFamily="2" charset="-78"/>
               </a:rPr>
               <a:t>لَوْ كُنْتَ طَبَّاخًا، مَاذَا تُحَضِّرُ لِضُيُوفِكَ؟</a:t>
@@ -7021,6 +7091,7 @@
                   <a:srgbClr val="D4AF37"/>
                 </a:solidFill>
                 <a:latin typeface="Amiri" pitchFamily="2" charset="-78"/>
+                <a:ea typeface="Amiri" pitchFamily="2" charset="-78"/>
                 <a:cs typeface="Amiri" pitchFamily="2" charset="-78"/>
               </a:rPr>
               <a:t>م</a:t>
@@ -7341,6 +7412,7 @@
                   <a:srgbClr val="8A6D1E"/>
                 </a:solidFill>
                 <a:latin typeface="Amiri" pitchFamily="2" charset="-78"/>
+                <a:ea typeface="Amiri" pitchFamily="2" charset="-78"/>
                 <a:cs typeface="Amiri" pitchFamily="2" charset="-78"/>
               </a:rPr>
               <a:t>وَرَقَةُ المُلَاحِظِ</a:t>
@@ -8811,6 +8883,7 @@
                   <a:srgbClr val="D4AF37"/>
                 </a:solidFill>
                 <a:latin typeface="Amiri" pitchFamily="2" charset="-78"/>
+                <a:ea typeface="Amiri" pitchFamily="2" charset="-78"/>
                 <a:cs typeface="Amiri" pitchFamily="2" charset="-78"/>
               </a:rPr>
               <a:t>م</a:t>
@@ -9131,6 +9204,7 @@
                   <a:srgbClr val="8A6D1E"/>
                 </a:solidFill>
                 <a:latin typeface="Amiri" pitchFamily="2" charset="-78"/>
+                <a:ea typeface="Amiri" pitchFamily="2" charset="-78"/>
                 <a:cs typeface="Amiri" pitchFamily="2" charset="-78"/>
               </a:rPr>
               <a:t>نَمُوذَجُ الإِجَابَةِ</a:t>
@@ -9373,6 +9447,7 @@
                   <a:srgbClr val="1B3B6F"/>
                 </a:solidFill>
                 <a:latin typeface="Amiri" pitchFamily="2" charset="-78"/>
+                <a:ea typeface="Amiri" pitchFamily="2" charset="-78"/>
                 <a:cs typeface="Amiri" pitchFamily="2" charset="-78"/>
               </a:rPr>
               <a:t>أُحِبُّ الدَّجَاجَ وَالأُرْزَ كَثِيرًا.</a:t>
@@ -9449,6 +9524,7 @@
                   <a:srgbClr val="1B3B6F"/>
                 </a:solidFill>
                 <a:latin typeface="Amiri" pitchFamily="2" charset="-78"/>
+                <a:ea typeface="Amiri" pitchFamily="2" charset="-78"/>
                 <a:cs typeface="Amiri" pitchFamily="2" charset="-78"/>
               </a:rPr>
               <a:t>أَهْلًا بِكَ! مَاذَا تُحِبُّ أَنْ تَأْكُلَ؟</a:t>
@@ -9552,6 +9628,7 @@
                   <a:srgbClr val="1B3B6F"/>
                 </a:solidFill>
                 <a:latin typeface="Amiri" pitchFamily="2" charset="-78"/>
+                <a:ea typeface="Amiri" pitchFamily="2" charset="-78"/>
                 <a:cs typeface="Amiri" pitchFamily="2" charset="-78"/>
               </a:rPr>
               <a:t>لَا، لَا آكُلُ السَّمَكَ، لٰكِنِّي أُحِبُّ اللَّحْمَ.</a:t>
@@ -9628,6 +9705,7 @@
                   <a:srgbClr val="1B3B6F"/>
                 </a:solidFill>
                 <a:latin typeface="Amiri" pitchFamily="2" charset="-78"/>
+                <a:ea typeface="Amiri" pitchFamily="2" charset="-78"/>
                 <a:cs typeface="Amiri" pitchFamily="2" charset="-78"/>
               </a:rPr>
               <a:t>هَلْ تَأْكُلُ السَّمَكَ؟</a:t>
@@ -9731,6 +9809,7 @@
                   <a:srgbClr val="1B3B6F"/>
                 </a:solidFill>
                 <a:latin typeface="Amiri" pitchFamily="2" charset="-78"/>
+                <a:ea typeface="Amiri" pitchFamily="2" charset="-78"/>
                 <a:cs typeface="Amiri" pitchFamily="2" charset="-78"/>
               </a:rPr>
               <a:t>أَشْرَبُ عَصِيرَ البُرْتُقَالِ، مِنْ فَضْلِكِ.</a:t>
@@ -9807,6 +9886,7 @@
                   <a:srgbClr val="1B3B6F"/>
                 </a:solidFill>
                 <a:latin typeface="Amiri" pitchFamily="2" charset="-78"/>
+                <a:ea typeface="Amiri" pitchFamily="2" charset="-78"/>
                 <a:cs typeface="Amiri" pitchFamily="2" charset="-78"/>
               </a:rPr>
               <a:t>مَاذَا تَشْرَبُ؟</a:t>
@@ -9910,6 +9990,7 @@
                   <a:srgbClr val="1B3B6F"/>
                 </a:solidFill>
                 <a:latin typeface="Amiri" pitchFamily="2" charset="-78"/>
+                <a:ea typeface="Amiri" pitchFamily="2" charset="-78"/>
                 <a:cs typeface="Amiri" pitchFamily="2" charset="-78"/>
               </a:rPr>
               <a:t>فَاكِهَتِي المُفَضَّلَةُ هِيَ المَانْجُو.</a:t>
@@ -9986,6 +10067,7 @@
                   <a:srgbClr val="1B3B6F"/>
                 </a:solidFill>
                 <a:latin typeface="Amiri" pitchFamily="2" charset="-78"/>
+                <a:ea typeface="Amiri" pitchFamily="2" charset="-78"/>
                 <a:cs typeface="Amiri" pitchFamily="2" charset="-78"/>
               </a:rPr>
               <a:t>مَا فَاكِهَتُكَ المُفَضَّلَةُ؟</a:t>
@@ -10089,6 +10171,7 @@
                   <a:srgbClr val="1B3B6F"/>
                 </a:solidFill>
                 <a:latin typeface="Amiri" pitchFamily="2" charset="-78"/>
+                <a:ea typeface="Amiri" pitchFamily="2" charset="-78"/>
                 <a:cs typeface="Amiri" pitchFamily="2" charset="-78"/>
               </a:rPr>
               <a:t>نَعَمْ، الطَّعَامُ لَذِيذٌ جِدًّا، شُكْرًا جَزِيلًا.</a:t>
@@ -10165,6 +10248,7 @@
                   <a:srgbClr val="1B3B6F"/>
                 </a:solidFill>
                 <a:latin typeface="Amiri" pitchFamily="2" charset="-78"/>
+                <a:ea typeface="Amiri" pitchFamily="2" charset="-78"/>
                 <a:cs typeface="Amiri" pitchFamily="2" charset="-78"/>
               </a:rPr>
               <a:t>هَلْ أَعْجَبَكَ الطَّعَامُ؟</a:t>
@@ -10374,6 +10458,7 @@
                   <a:srgbClr val="D4AF37"/>
                 </a:solidFill>
                 <a:latin typeface="Amiri" pitchFamily="2" charset="-78"/>
+                <a:ea typeface="Amiri" pitchFamily="2" charset="-78"/>
                 <a:cs typeface="Amiri" pitchFamily="2" charset="-78"/>
               </a:rPr>
               <a:t>م</a:t>
@@ -10694,6 +10779,7 @@
                   <a:srgbClr val="8A6D1E"/>
                 </a:solidFill>
                 <a:latin typeface="Amiri" pitchFamily="2" charset="-78"/>
+                <a:ea typeface="Amiri" pitchFamily="2" charset="-78"/>
                 <a:cs typeface="Amiri" pitchFamily="2" charset="-78"/>
               </a:rPr>
               <a:t>نَمُوذَجُ الإِجَابَةِ</a:t>
@@ -10936,6 +11022,7 @@
                   <a:srgbClr val="1B3B6F"/>
                 </a:solidFill>
                 <a:latin typeface="Amiri" pitchFamily="2" charset="-78"/>
+                <a:ea typeface="Amiri" pitchFamily="2" charset="-78"/>
                 <a:cs typeface="Amiri" pitchFamily="2" charset="-78"/>
               </a:rPr>
               <a:t>أَتَنَاوَلُ الغَدَاءَ فِي السَّاعَةِ الوَاحِدَةِ إِلَّا رُبْعًا.</a:t>
@@ -11012,6 +11099,7 @@
                   <a:srgbClr val="1B3B6F"/>
                 </a:solidFill>
                 <a:latin typeface="Amiri" pitchFamily="2" charset="-78"/>
+                <a:ea typeface="Amiri" pitchFamily="2" charset="-78"/>
                 <a:cs typeface="Amiri" pitchFamily="2" charset="-78"/>
               </a:rPr>
               <a:t>فِي أَيِّ سَاعَةٍ تَتَنَاوَلُ الغَدَاءَ؟</a:t>
@@ -11115,6 +11203,7 @@
                   <a:srgbClr val="1B3B6F"/>
                 </a:solidFill>
                 <a:latin typeface="Amiri" pitchFamily="2" charset="-78"/>
+                <a:ea typeface="Amiri" pitchFamily="2" charset="-78"/>
                 <a:cs typeface="Amiri" pitchFamily="2" charset="-78"/>
               </a:rPr>
               <a:t>عَادَةً آكُلُ شَطِيرَةَ جُبْنٍ وَتُفَّاحَةً.</a:t>
@@ -11191,6 +11280,7 @@
                   <a:srgbClr val="1B3B6F"/>
                 </a:solidFill>
                 <a:latin typeface="Amiri" pitchFamily="2" charset="-78"/>
+                <a:ea typeface="Amiri" pitchFamily="2" charset="-78"/>
                 <a:cs typeface="Amiri" pitchFamily="2" charset="-78"/>
               </a:rPr>
               <a:t>مَاذَا تَأْكُلُ عَادَةً فِي المَقْصَفِ؟</a:t>
@@ -11294,6 +11384,7 @@
                   <a:srgbClr val="1B3B6F"/>
                 </a:solidFill>
                 <a:latin typeface="Amiri" pitchFamily="2" charset="-78"/>
+                <a:ea typeface="Amiri" pitchFamily="2" charset="-78"/>
                 <a:cs typeface="Amiri" pitchFamily="2" charset="-78"/>
               </a:rPr>
               <a:t>طَعَامُ المَقْصَفِ لَذِيذٌ، لٰكِنَّهُ غَالٍ قَلِيلًا.</a:t>
@@ -11370,6 +11461,7 @@
                   <a:srgbClr val="1B3B6F"/>
                 </a:solidFill>
                 <a:latin typeface="Amiri" pitchFamily="2" charset="-78"/>
+                <a:ea typeface="Amiri" pitchFamily="2" charset="-78"/>
                 <a:cs typeface="Amiri" pitchFamily="2" charset="-78"/>
               </a:rPr>
               <a:t>مَا رَأْيُكَ فِي طَعَامِ المَقْصَفِ؟</a:t>
@@ -11473,6 +11565,7 @@
                   <a:srgbClr val="1B3B6F"/>
                 </a:solidFill>
                 <a:latin typeface="Amiri" pitchFamily="2" charset="-78"/>
+                <a:ea typeface="Amiri" pitchFamily="2" charset="-78"/>
                 <a:cs typeface="Amiri" pitchFamily="2" charset="-78"/>
               </a:rPr>
               <a:t>هَلْ عِنْدَكُمْ أَطْبَاقٌ نَبَاتِيَّةٌ؟</a:t>
@@ -11549,6 +11642,7 @@
                   <a:srgbClr val="1B3B6F"/>
                 </a:solidFill>
                 <a:latin typeface="Amiri" pitchFamily="2" charset="-78"/>
+                <a:ea typeface="Amiri" pitchFamily="2" charset="-78"/>
                 <a:cs typeface="Amiri" pitchFamily="2" charset="-78"/>
               </a:rPr>
               <a:t>… نَعَمْ، عِنْدَنَا شُورْبَةُ العَدَسِ كُلَّ يَوْمٍ.</a:t>
@@ -11652,6 +11746,7 @@
                   <a:srgbClr val="1B3B6F"/>
                 </a:solidFill>
                 <a:latin typeface="Amiri" pitchFamily="2" charset="-78"/>
+                <a:ea typeface="Amiri" pitchFamily="2" charset="-78"/>
                 <a:cs typeface="Amiri" pitchFamily="2" charset="-78"/>
               </a:rPr>
               <a:t>أُرِيدُ أَنْ تُضِيفُوا سَلَطَةَ فَوَاكِهَ طَازَجَةً، لِأَنَّهَا صِحِّيَّةٌ.</a:t>
@@ -11728,6 +11823,7 @@
                   <a:srgbClr val="1B3B6F"/>
                 </a:solidFill>
                 <a:latin typeface="Amiri" pitchFamily="2" charset="-78"/>
+                <a:ea typeface="Amiri" pitchFamily="2" charset="-78"/>
                 <a:cs typeface="Amiri" pitchFamily="2" charset="-78"/>
               </a:rPr>
               <a:t>مَاذَا تُرِيدُ أَنْ نُضِيفَ إِلَى القَائِمَةِ؟</a:t>
@@ -11937,6 +12033,7 @@
                   <a:srgbClr val="D4AF37"/>
                 </a:solidFill>
                 <a:latin typeface="Amiri" pitchFamily="2" charset="-78"/>
+                <a:ea typeface="Amiri" pitchFamily="2" charset="-78"/>
                 <a:cs typeface="Amiri" pitchFamily="2" charset="-78"/>
               </a:rPr>
               <a:t>م</a:t>
@@ -12257,6 +12354,7 @@
                   <a:srgbClr val="8A6D1E"/>
                 </a:solidFill>
                 <a:latin typeface="Amiri" pitchFamily="2" charset="-78"/>
+                <a:ea typeface="Amiri" pitchFamily="2" charset="-78"/>
                 <a:cs typeface="Amiri" pitchFamily="2" charset="-78"/>
               </a:rPr>
               <a:t>نَمُوذَجُ الإِجَابَةِ</a:t>
@@ -12499,6 +12597,7 @@
                   <a:srgbClr val="1B3B6F"/>
                 </a:solidFill>
                 <a:latin typeface="Amiri" pitchFamily="2" charset="-78"/>
+                <a:ea typeface="Amiri" pitchFamily="2" charset="-78"/>
                 <a:cs typeface="Amiri" pitchFamily="2" charset="-78"/>
               </a:rPr>
               <a:t>أَتَنَاوَلُ ثَلَاثَ وَجَبَاتٍ: الفُطُورَ فِي السَّابِعَةِ، وَالغَدَاءَ فِي المَدْرَسَةِ، وَالعَشَاءَ مَعَ أُسْرَتِي.</a:t>
@@ -12575,6 +12674,7 @@
                   <a:srgbClr val="1B3B6F"/>
                 </a:solidFill>
                 <a:latin typeface="Amiri" pitchFamily="2" charset="-78"/>
+                <a:ea typeface="Amiri" pitchFamily="2" charset="-78"/>
                 <a:cs typeface="Amiri" pitchFamily="2" charset="-78"/>
               </a:rPr>
               <a:t>كَمْ وَجْبَةً تَتَنَاوَلُ فِي اليَوْمِ؟ وَمَتَى؟</a:t>
@@ -12678,6 +12778,7 @@
                   <a:srgbClr val="1B3B6F"/>
                 </a:solidFill>
                 <a:latin typeface="Amiri" pitchFamily="2" charset="-78"/>
+                <a:ea typeface="Amiri" pitchFamily="2" charset="-78"/>
                 <a:cs typeface="Amiri" pitchFamily="2" charset="-78"/>
               </a:rPr>
               <a:t>الطَّبَقُ المُفَضَّلُ فِي أُسْرَتِي هُوَ البِرْيَانِي، لِأَنَّ أُمِّي تَطْبُخُهُ بِبَهَارَاتٍ لَذِيذَةٍ.</a:t>
@@ -12754,6 +12855,7 @@
                   <a:srgbClr val="1B3B6F"/>
                 </a:solidFill>
                 <a:latin typeface="Amiri" pitchFamily="2" charset="-78"/>
+                <a:ea typeface="Amiri" pitchFamily="2" charset="-78"/>
                 <a:cs typeface="Amiri" pitchFamily="2" charset="-78"/>
               </a:rPr>
               <a:t>مَا الطَّبَقُ المُفَضَّلُ فِي أُسْرَتِكَ؟</a:t>
@@ -12857,6 +12959,7 @@
                   <a:srgbClr val="1B3B6F"/>
                 </a:solidFill>
                 <a:latin typeface="Amiri" pitchFamily="2" charset="-78"/>
+                <a:ea typeface="Amiri" pitchFamily="2" charset="-78"/>
                 <a:cs typeface="Amiri" pitchFamily="2" charset="-78"/>
               </a:rPr>
               <a:t>نَعَمْ، أُسَاعِدُ أُمِّي أَحْيَانًا؛ أَغْسِلُ الخُضَارَ وَأُحَضِّرُ السَّلَطَةَ.</a:t>
@@ -12933,6 +13036,7 @@
                   <a:srgbClr val="1B3B6F"/>
                 </a:solidFill>
                 <a:latin typeface="Amiri" pitchFamily="2" charset="-78"/>
+                <a:ea typeface="Amiri" pitchFamily="2" charset="-78"/>
                 <a:cs typeface="Amiri" pitchFamily="2" charset="-78"/>
               </a:rPr>
               <a:t>هَلْ تُسَاعِدُ فِي المَطْبَخِ؟</a:t>
@@ -13036,6 +13140,7 @@
                   <a:srgbClr val="1B3B6F"/>
                 </a:solidFill>
                 <a:latin typeface="Amiri" pitchFamily="2" charset="-78"/>
+                <a:ea typeface="Amiri" pitchFamily="2" charset="-78"/>
                 <a:cs typeface="Amiri" pitchFamily="2" charset="-78"/>
               </a:rPr>
               <a:t>مَا الأَكْلَةُ المَشْهُورَةُ فِي بَلَدِكُمْ؟</a:t>
@@ -13112,6 +13217,7 @@
                   <a:srgbClr val="1B3B6F"/>
                 </a:solidFill>
                 <a:latin typeface="Amiri" pitchFamily="2" charset="-78"/>
+                <a:ea typeface="Amiri" pitchFamily="2" charset="-78"/>
                 <a:cs typeface="Amiri" pitchFamily="2" charset="-78"/>
               </a:rPr>
               <a:t>… المَنْسَفُ: لَحْمٌ مَعَ أُرْزٍ وَلَبَنٍ.</a:t>
@@ -13215,6 +13321,7 @@
                   <a:srgbClr val="1B3B6F"/>
                 </a:solidFill>
                 <a:latin typeface="Amiri" pitchFamily="2" charset="-78"/>
+                <a:ea typeface="Amiri" pitchFamily="2" charset="-78"/>
                 <a:cs typeface="Amiri" pitchFamily="2" charset="-78"/>
               </a:rPr>
               <a:t>لَا أُحِبُّ البَصَلَ النِّيءَ، لِأَنَّ طَعْمَهُ قَوِيٌّ جِدًّا.</a:t>
@@ -13291,6 +13398,7 @@
                   <a:srgbClr val="1B3B6F"/>
                 </a:solidFill>
                 <a:latin typeface="Amiri" pitchFamily="2" charset="-78"/>
+                <a:ea typeface="Amiri" pitchFamily="2" charset="-78"/>
                 <a:cs typeface="Amiri" pitchFamily="2" charset="-78"/>
               </a:rPr>
               <a:t>مَا الطَّعَامُ الَّذِي لَا تُحِبُّهُ؟ لِمَاذَا؟</a:t>
@@ -13500,6 +13608,7 @@
                   <a:srgbClr val="D4AF37"/>
                 </a:solidFill>
                 <a:latin typeface="Amiri" pitchFamily="2" charset="-78"/>
+                <a:ea typeface="Amiri" pitchFamily="2" charset="-78"/>
                 <a:cs typeface="Amiri" pitchFamily="2" charset="-78"/>
               </a:rPr>
               <a:t>م</a:t>
@@ -13820,6 +13929,7 @@
                   <a:srgbClr val="8A6D1E"/>
                 </a:solidFill>
                 <a:latin typeface="Amiri" pitchFamily="2" charset="-78"/>
+                <a:ea typeface="Amiri" pitchFamily="2" charset="-78"/>
                 <a:cs typeface="Amiri" pitchFamily="2" charset="-78"/>
               </a:rPr>
               <a:t>نَمُوذَجُ الإِجَابَةِ</a:t>
@@ -14062,6 +14172,7 @@
                   <a:srgbClr val="1B3B6F"/>
                 </a:solidFill>
                 <a:latin typeface="Amiri" pitchFamily="2" charset="-78"/>
+                <a:ea typeface="Amiri" pitchFamily="2" charset="-78"/>
                 <a:cs typeface="Amiri" pitchFamily="2" charset="-78"/>
               </a:rPr>
               <a:t>نَتَنَاوَلُ العَشَاءَ مَعًا كُلَّ مَسَاءٍ، وَنُفَضِّلُ الأَطْبَاقَ البَيْتِيَّةَ عَلَى الوَجَبَاتِ السَّرِيعَةِ.</a:t>
@@ -14138,6 +14249,7 @@
                   <a:srgbClr val="1B3B6F"/>
                 </a:solidFill>
                 <a:latin typeface="Amiri" pitchFamily="2" charset="-78"/>
+                <a:ea typeface="Amiri" pitchFamily="2" charset="-78"/>
                 <a:cs typeface="Amiri" pitchFamily="2" charset="-78"/>
               </a:rPr>
               <a:t>صِفْ عَادَاتِ أُسْرَتِكَ فِي الطَّعَامِ.</a:t>
@@ -14241,6 +14353,7 @@
                   <a:srgbClr val="1B3B6F"/>
                 </a:solidFill>
                 <a:latin typeface="Amiri" pitchFamily="2" charset="-78"/>
+                <a:ea typeface="Amiri" pitchFamily="2" charset="-78"/>
                 <a:cs typeface="Amiri" pitchFamily="2" charset="-78"/>
               </a:rPr>
               <a:t>فِي العِيدِ المَاضِي أَكَلْنَا لَحْمَ الخَرُوفِ مَعَ الأُرْزِ، وَحَضَّرَتْ جَدَّتِي حَلَوِيَّاتٍ كَثِيرَةً.</a:t>
@@ -14317,6 +14430,7 @@
                   <a:srgbClr val="1B3B6F"/>
                 </a:solidFill>
                 <a:latin typeface="Amiri" pitchFamily="2" charset="-78"/>
+                <a:ea typeface="Amiri" pitchFamily="2" charset="-78"/>
                 <a:cs typeface="Amiri" pitchFamily="2" charset="-78"/>
               </a:rPr>
               <a:t>مَاذَا أَكَلْتُمْ فِي آخِرِ مُنَاسَبَةٍ عَائِلِيَّةٍ؟</a:t>
@@ -14420,6 +14534,7 @@
                   <a:srgbClr val="1B3B6F"/>
                 </a:solidFill>
                 <a:latin typeface="Amiri" pitchFamily="2" charset="-78"/>
+                <a:ea typeface="Amiri" pitchFamily="2" charset="-78"/>
                 <a:cs typeface="Amiri" pitchFamily="2" charset="-78"/>
               </a:rPr>
               <a:t>أُفَضِّلُ الطَّعَامَ التَّقْلِيدِيَّ لِأَنَّهُ يُذَكِّرُنِي بِبَلَدِ أَجْدَادِي، لٰكِنِّي أُحِبُّ تَجْرِبَةَ أَطْبَاقٍ جَدِيدَةٍ أَيْضًا.</a:t>
@@ -14496,6 +14611,7 @@
                   <a:srgbClr val="1B3B6F"/>
                 </a:solidFill>
                 <a:latin typeface="Amiri" pitchFamily="2" charset="-78"/>
+                <a:ea typeface="Amiri" pitchFamily="2" charset="-78"/>
                 <a:cs typeface="Amiri" pitchFamily="2" charset="-78"/>
               </a:rPr>
               <a:t>هَلْ تُفَضِّلُ الطَّعَامَ التَّقْلِيدِيَّ أَمِ الحَدِيثَ؟ لِمَاذَا؟</a:t>
@@ -14599,6 +14715,7 @@
                   <a:srgbClr val="1B3B6F"/>
                 </a:solidFill>
                 <a:latin typeface="Amiri" pitchFamily="2" charset="-78"/>
+                <a:ea typeface="Amiri" pitchFamily="2" charset="-78"/>
                 <a:cs typeface="Amiri" pitchFamily="2" charset="-78"/>
               </a:rPr>
               <a:t>بَيْنَمَا يُحِبُّ البِرِيطَانِيُّونَ السَّمَكَ وَالبَطَاطَا، يُفَضِّلُ النَّاسُ فِي بَاكِسْتَانَ الأَطْعِمَةَ الحَارَّةَ بِالبَهَارَاتِ.</a:t>
@@ -14675,6 +14792,7 @@
                   <a:srgbClr val="1B3B6F"/>
                 </a:solidFill>
                 <a:latin typeface="Amiri" pitchFamily="2" charset="-78"/>
+                <a:ea typeface="Amiri" pitchFamily="2" charset="-78"/>
                 <a:cs typeface="Amiri" pitchFamily="2" charset="-78"/>
               </a:rPr>
               <a:t>قَارِنْ بَيْنَ الطَّعَامِ فِي بَلَدَيْنِ تَعْرِفُهُمَا.</a:t>
@@ -14778,6 +14896,7 @@
                   <a:srgbClr val="1B3B6F"/>
                 </a:solidFill>
                 <a:latin typeface="Amiri" pitchFamily="2" charset="-78"/>
+                <a:ea typeface="Amiri" pitchFamily="2" charset="-78"/>
                 <a:cs typeface="Amiri" pitchFamily="2" charset="-78"/>
               </a:rPr>
               <a:t>لَوْ كُنْتُ طَبَّاخًا، لَحَضَّرْتُ لَهُمْ شُورْبَةً سَاخِنَةً، ثُمَّ دَجَاجًا مَشْوِيًّا مَعَ الأُرْزِ.</a:t>
@@ -14854,6 +14973,7 @@
                   <a:srgbClr val="1B3B6F"/>
                 </a:solidFill>
                 <a:latin typeface="Amiri" pitchFamily="2" charset="-78"/>
+                <a:ea typeface="Amiri" pitchFamily="2" charset="-78"/>
                 <a:cs typeface="Amiri" pitchFamily="2" charset="-78"/>
               </a:rPr>
               <a:t>لَوْ كُنْتَ طَبَّاخًا، مَاذَا تُحَضِّرُ لِضُيُوفِكَ؟</a:t>
@@ -15063,6 +15183,7 @@
                   <a:srgbClr val="D4AF37"/>
                 </a:solidFill>
                 <a:latin typeface="Amiri" pitchFamily="2" charset="-78"/>
+                <a:ea typeface="Amiri" pitchFamily="2" charset="-78"/>
                 <a:cs typeface="Amiri" pitchFamily="2" charset="-78"/>
               </a:rPr>
               <a:t>م</a:t>
@@ -15383,6 +15504,7 @@
                   <a:srgbClr val="8A6D1E"/>
                 </a:solidFill>
                 <a:latin typeface="Amiri" pitchFamily="2" charset="-78"/>
+                <a:ea typeface="Amiri" pitchFamily="2" charset="-78"/>
                 <a:cs typeface="Amiri" pitchFamily="2" charset="-78"/>
               </a:rPr>
               <a:t>طَعَامِي</a:t>
@@ -15663,6 +15785,7 @@
                   <a:srgbClr val="1B3B6F"/>
                 </a:solidFill>
                 <a:latin typeface="Amiri" pitchFamily="2" charset="-78"/>
+                <a:ea typeface="Amiri" pitchFamily="2" charset="-78"/>
                 <a:cs typeface="Amiri" pitchFamily="2" charset="-78"/>
               </a:rPr>
               <a:t>آكُلُ …</a:t>
@@ -15739,6 +15862,7 @@
                   <a:srgbClr val="1B3B6F"/>
                 </a:solidFill>
                 <a:latin typeface="Amiri" pitchFamily="2" charset="-78"/>
+                <a:ea typeface="Amiri" pitchFamily="2" charset="-78"/>
                 <a:cs typeface="Amiri" pitchFamily="2" charset="-78"/>
               </a:rPr>
               <a:t>مَاذَا تَأْكُلُ فِي الفُطُورِ؟</a:t>
@@ -15907,6 +16031,7 @@
                   <a:srgbClr val="1B3B6F"/>
                 </a:solidFill>
                 <a:latin typeface="Amiri" pitchFamily="2" charset="-78"/>
+                <a:ea typeface="Amiri" pitchFamily="2" charset="-78"/>
                 <a:cs typeface="Amiri" pitchFamily="2" charset="-78"/>
               </a:rPr>
               <a:t>طَعَامِي المُفَضَّلُ هُوَ …</a:t>
@@ -15983,6 +16108,7 @@
                   <a:srgbClr val="1B3B6F"/>
                 </a:solidFill>
                 <a:latin typeface="Amiri" pitchFamily="2" charset="-78"/>
+                <a:ea typeface="Amiri" pitchFamily="2" charset="-78"/>
                 <a:cs typeface="Amiri" pitchFamily="2" charset="-78"/>
               </a:rPr>
               <a:t>مَا طَعَامُكَ المُفَضَّلُ؟</a:t>
@@ -16151,6 +16277,7 @@
                   <a:srgbClr val="1B3B6F"/>
                 </a:solidFill>
                 <a:latin typeface="Amiri" pitchFamily="2" charset="-78"/>
+                <a:ea typeface="Amiri" pitchFamily="2" charset="-78"/>
                 <a:cs typeface="Amiri" pitchFamily="2" charset="-78"/>
               </a:rPr>
               <a:t>أَشْرَبُ … عَادَةً</a:t>
@@ -16227,6 +16354,7 @@
                   <a:srgbClr val="1B3B6F"/>
                 </a:solidFill>
                 <a:latin typeface="Amiri" pitchFamily="2" charset="-78"/>
+                <a:ea typeface="Amiri" pitchFamily="2" charset="-78"/>
                 <a:cs typeface="Amiri" pitchFamily="2" charset="-78"/>
               </a:rPr>
               <a:t>مَاذَا تَشْرَبُ عَادَةً؟</a:t>
@@ -16395,6 +16523,7 @@
                   <a:srgbClr val="1B3B6F"/>
                 </a:solidFill>
                 <a:latin typeface="Amiri" pitchFamily="2" charset="-78"/>
+                <a:ea typeface="Amiri" pitchFamily="2" charset="-78"/>
                 <a:cs typeface="Amiri" pitchFamily="2" charset="-78"/>
               </a:rPr>
               <a:t>نَعَمْ، أُحِبُّ … / لَا …</a:t>
@@ -16471,6 +16600,7 @@
                   <a:srgbClr val="1B3B6F"/>
                 </a:solidFill>
                 <a:latin typeface="Amiri" pitchFamily="2" charset="-78"/>
+                <a:ea typeface="Amiri" pitchFamily="2" charset="-78"/>
                 <a:cs typeface="Amiri" pitchFamily="2" charset="-78"/>
               </a:rPr>
               <a:t>هَلْ تُحِبُّ الخُضَارَ؟</a:t>
@@ -16639,6 +16769,7 @@
                   <a:srgbClr val="1B3B6F"/>
                 </a:solidFill>
                 <a:latin typeface="Amiri" pitchFamily="2" charset="-78"/>
+                <a:ea typeface="Amiri" pitchFamily="2" charset="-78"/>
                 <a:cs typeface="Amiri" pitchFamily="2" charset="-78"/>
               </a:rPr>
               <a:t>أَتَنَاوَلُ الغَدَاءَ فِي …</a:t>
@@ -16715,6 +16846,7 @@
                   <a:srgbClr val="1B3B6F"/>
                 </a:solidFill>
                 <a:latin typeface="Amiri" pitchFamily="2" charset="-78"/>
+                <a:ea typeface="Amiri" pitchFamily="2" charset="-78"/>
                 <a:cs typeface="Amiri" pitchFamily="2" charset="-78"/>
               </a:rPr>
               <a:t>أَيْنَ تَتَنَاوَلُ الغَدَاءَ؟</a:t>
@@ -16869,6 +17001,7 @@
                   <a:srgbClr val="1B3B6F"/>
                 </a:solidFill>
                 <a:latin typeface="Amiri" pitchFamily="2" charset="-78"/>
+                <a:ea typeface="Amiri" pitchFamily="2" charset="-78"/>
                 <a:cs typeface="Amiri" pitchFamily="2" charset="-78"/>
               </a:rPr>
               <a:t>عَفْوًا، هَلْ يُمْكِنُ أَنْ تُعِيدَ السُّؤَالَ؟</a:t>
@@ -17002,6 +17135,7 @@
                   <a:srgbClr val="D4AF37"/>
                 </a:solidFill>
                 <a:latin typeface="Amiri" pitchFamily="2" charset="-78"/>
+                <a:ea typeface="Amiri" pitchFamily="2" charset="-78"/>
                 <a:cs typeface="Amiri" pitchFamily="2" charset="-78"/>
               </a:rPr>
               <a:t>م</a:t>
@@ -17322,6 +17456,7 @@
                   <a:srgbClr val="8A6D1E"/>
                 </a:solidFill>
                 <a:latin typeface="Amiri" pitchFamily="2" charset="-78"/>
+                <a:ea typeface="Amiri" pitchFamily="2" charset="-78"/>
                 <a:cs typeface="Amiri" pitchFamily="2" charset="-78"/>
               </a:rPr>
               <a:t>وَجَبَاتِي</a:t>
@@ -17602,6 +17737,7 @@
                   <a:srgbClr val="1B3B6F"/>
                 </a:solidFill>
                 <a:latin typeface="Amiri" pitchFamily="2" charset="-78"/>
+                <a:ea typeface="Amiri" pitchFamily="2" charset="-78"/>
                 <a:cs typeface="Amiri" pitchFamily="2" charset="-78"/>
               </a:rPr>
               <a:t>نَتَنَاوَلُ العَشَاءَ فِي … عَادَةً نَأْكُلُ …</a:t>
@@ -17678,6 +17814,7 @@
                   <a:srgbClr val="1B3B6F"/>
                 </a:solidFill>
                 <a:latin typeface="Amiri" pitchFamily="2" charset="-78"/>
+                <a:ea typeface="Amiri" pitchFamily="2" charset="-78"/>
                 <a:cs typeface="Amiri" pitchFamily="2" charset="-78"/>
               </a:rPr>
               <a:t>صِفْ وَجْبَةَ العَشَاءِ فِي بَيْتِكَ.</a:t>
@@ -17781,6 +17918,7 @@
                   <a:srgbClr val="1B3B6F"/>
                 </a:solidFill>
                 <a:latin typeface="Amiri" pitchFamily="2" charset="-78"/>
+                <a:ea typeface="Amiri" pitchFamily="2" charset="-78"/>
                 <a:cs typeface="Amiri" pitchFamily="2" charset="-78"/>
               </a:rPr>
               <a:t>لَا أُحِبُّ … لِأَنَّ …</a:t>
@@ -17857,6 +17995,7 @@
                   <a:srgbClr val="1B3B6F"/>
                 </a:solidFill>
                 <a:latin typeface="Amiri" pitchFamily="2" charset="-78"/>
+                <a:ea typeface="Amiri" pitchFamily="2" charset="-78"/>
                 <a:cs typeface="Amiri" pitchFamily="2" charset="-78"/>
               </a:rPr>
               <a:t>مَا الطَّعَامُ الَّذِي لَا تُحِبُّهُ؟ لِمَاذَا؟</a:t>
@@ -17960,6 +18099,7 @@
                   <a:srgbClr val="1B3B6F"/>
                 </a:solidFill>
                 <a:latin typeface="Amiri" pitchFamily="2" charset="-78"/>
+                <a:ea typeface="Amiri" pitchFamily="2" charset="-78"/>
                 <a:cs typeface="Amiri" pitchFamily="2" charset="-78"/>
               </a:rPr>
               <a:t>تَطْبُخُ … غَالِبًا، وَأَحْيَانًا …</a:t>
@@ -18036,6 +18176,7 @@
                   <a:srgbClr val="1B3B6F"/>
                 </a:solidFill>
                 <a:latin typeface="Amiri" pitchFamily="2" charset="-78"/>
+                <a:ea typeface="Amiri" pitchFamily="2" charset="-78"/>
                 <a:cs typeface="Amiri" pitchFamily="2" charset="-78"/>
               </a:rPr>
               <a:t>مَنْ يَطْبُخُ فِي بَيْتِكَ؟</a:t>
@@ -18139,6 +18280,7 @@
                   <a:srgbClr val="1B3B6F"/>
                 </a:solidFill>
                 <a:latin typeface="Amiri" pitchFamily="2" charset="-78"/>
+                <a:ea typeface="Amiri" pitchFamily="2" charset="-78"/>
                 <a:cs typeface="Amiri" pitchFamily="2" charset="-78"/>
               </a:rPr>
               <a:t>أَمْسِ أَكَلْتُ …</a:t>
@@ -18215,6 +18357,7 @@
                   <a:srgbClr val="1B3B6F"/>
                 </a:solidFill>
                 <a:latin typeface="Amiri" pitchFamily="2" charset="-78"/>
+                <a:ea typeface="Amiri" pitchFamily="2" charset="-78"/>
                 <a:cs typeface="Amiri" pitchFamily="2" charset="-78"/>
               </a:rPr>
               <a:t>مَاذَا أَكَلْتَ أَمْسِ؟</a:t>
@@ -18318,6 +18461,7 @@
                   <a:srgbClr val="1B3B6F"/>
                 </a:solidFill>
                 <a:latin typeface="Amiri" pitchFamily="2" charset="-78"/>
+                <a:ea typeface="Amiri" pitchFamily="2" charset="-78"/>
                 <a:cs typeface="Amiri" pitchFamily="2" charset="-78"/>
               </a:rPr>
               <a:t>أُرِيدُ أَنْ أَتَعَلَّمَ طَبْخَ … لِأَنَّ …</a:t>
@@ -18394,6 +18538,7 @@
                   <a:srgbClr val="1B3B6F"/>
                 </a:solidFill>
                 <a:latin typeface="Amiri" pitchFamily="2" charset="-78"/>
+                <a:ea typeface="Amiri" pitchFamily="2" charset="-78"/>
                 <a:cs typeface="Amiri" pitchFamily="2" charset="-78"/>
               </a:rPr>
               <a:t>مَا الأَكْلَةُ الَّتِي تُرِيدُ أَنْ تَتَعَلَّمَ طَبْخَهَا؟</a:t>
@@ -18603,6 +18748,7 @@
                   <a:srgbClr val="D4AF37"/>
                 </a:solidFill>
                 <a:latin typeface="Amiri" pitchFamily="2" charset="-78"/>
+                <a:ea typeface="Amiri" pitchFamily="2" charset="-78"/>
                 <a:cs typeface="Amiri" pitchFamily="2" charset="-78"/>
               </a:rPr>
               <a:t>م</a:t>
@@ -18923,6 +19069,7 @@
                   <a:srgbClr val="8A6D1E"/>
                 </a:solidFill>
                 <a:latin typeface="Amiri" pitchFamily="2" charset="-78"/>
+                <a:ea typeface="Amiri" pitchFamily="2" charset="-78"/>
                 <a:cs typeface="Amiri" pitchFamily="2" charset="-78"/>
               </a:rPr>
               <a:t>عَادَاتُ الأَكْلِ</a:t>
@@ -19203,6 +19350,7 @@
                   <a:srgbClr val="1B3B6F"/>
                 </a:solidFill>
                 <a:latin typeface="Amiri" pitchFamily="2" charset="-78"/>
+                <a:ea typeface="Amiri" pitchFamily="2" charset="-78"/>
                 <a:cs typeface="Amiri" pitchFamily="2" charset="-78"/>
               </a:rPr>
               <a:t>نَعَمْ … وَهٰذَا مُهِمٌّ لِأَنَّ …</a:t>
@@ -19279,6 +19427,7 @@
                   <a:srgbClr val="1B3B6F"/>
                 </a:solidFill>
                 <a:latin typeface="Amiri" pitchFamily="2" charset="-78"/>
+                <a:ea typeface="Amiri" pitchFamily="2" charset="-78"/>
                 <a:cs typeface="Amiri" pitchFamily="2" charset="-78"/>
               </a:rPr>
               <a:t>هَلْ تَأْكُلُ أُسْرَتُكَ مَعًا؟ مَا أَهَمِّيَّةُ ذٰلِكَ؟</a:t>
@@ -19382,6 +19531,7 @@
                   <a:srgbClr val="1B3B6F"/>
                 </a:solidFill>
                 <a:latin typeface="Amiri" pitchFamily="2" charset="-78"/>
+                <a:ea typeface="Amiri" pitchFamily="2" charset="-78"/>
                 <a:cs typeface="Amiri" pitchFamily="2" charset="-78"/>
               </a:rPr>
               <a:t>فِي المَاضِي كَانَ النَّاسُ … أَمَّا اليَوْمَ فَيَطْلُبُونَ …</a:t>
@@ -19458,6 +19608,7 @@
                   <a:srgbClr val="1B3B6F"/>
                 </a:solidFill>
                 <a:latin typeface="Amiri" pitchFamily="2" charset="-78"/>
+                <a:ea typeface="Amiri" pitchFamily="2" charset="-78"/>
                 <a:cs typeface="Amiri" pitchFamily="2" charset="-78"/>
               </a:rPr>
               <a:t>كَيْفَ تَغَيَّرَتْ عَادَاتُ الأَكْلِ فِي رَأْيِكَ؟</a:t>
@@ -19561,6 +19712,7 @@
                   <a:srgbClr val="1B3B6F"/>
                 </a:solidFill>
                 <a:latin typeface="Amiri" pitchFamily="2" charset="-78"/>
+                <a:ea typeface="Amiri" pitchFamily="2" charset="-78"/>
                 <a:cs typeface="Amiri" pitchFamily="2" charset="-78"/>
               </a:rPr>
               <a:t>… أَكْلَةٌ مَشْهُورَةٌ، تُطْبَخُ بِالخُضَارِ …</a:t>
@@ -19637,6 +19789,7 @@
                   <a:srgbClr val="1B3B6F"/>
                 </a:solidFill>
                 <a:latin typeface="Amiri" pitchFamily="2" charset="-78"/>
+                <a:ea typeface="Amiri" pitchFamily="2" charset="-78"/>
                 <a:cs typeface="Amiri" pitchFamily="2" charset="-78"/>
               </a:rPr>
               <a:t>صِفْ أَكْلَةً تَقْلِيدِيَّةً مِنْ بَلَدِ أُسْرَتِكَ.</a:t>
@@ -19740,6 +19893,7 @@
                   <a:srgbClr val="1B3B6F"/>
                 </a:solidFill>
                 <a:latin typeface="Amiri" pitchFamily="2" charset="-78"/>
+                <a:ea typeface="Amiri" pitchFamily="2" charset="-78"/>
                 <a:cs typeface="Amiri" pitchFamily="2" charset="-78"/>
               </a:rPr>
               <a:t>أَجْمَلُ وَجْبَةٍ أَتَذَكَّرُهَا كَانَتْ …</a:t>
@@ -19816,6 +19970,7 @@
                   <a:srgbClr val="1B3B6F"/>
                 </a:solidFill>
                 <a:latin typeface="Amiri" pitchFamily="2" charset="-78"/>
+                <a:ea typeface="Amiri" pitchFamily="2" charset="-78"/>
                 <a:cs typeface="Amiri" pitchFamily="2" charset="-78"/>
               </a:rPr>
               <a:t>مَا أَجْمَلُ وَجْبَةٍ تَتَذَكَّرُهَا؟</a:t>
@@ -19919,6 +20074,7 @@
                   <a:srgbClr val="1B3B6F"/>
                 </a:solidFill>
                 <a:latin typeface="Amiri" pitchFamily="2" charset="-78"/>
+                <a:ea typeface="Amiri" pitchFamily="2" charset="-78"/>
                 <a:cs typeface="Amiri" pitchFamily="2" charset="-78"/>
               </a:rPr>
               <a:t>لَوْ فَتَحْتُ مَطْعَمًا، لَقَدَّمْتُ …</a:t>
@@ -19995,6 +20151,7 @@
                   <a:srgbClr val="1B3B6F"/>
                 </a:solidFill>
                 <a:latin typeface="Amiri" pitchFamily="2" charset="-78"/>
+                <a:ea typeface="Amiri" pitchFamily="2" charset="-78"/>
                 <a:cs typeface="Amiri" pitchFamily="2" charset="-78"/>
               </a:rPr>
               <a:t>لَوْ فَتَحْتَ مَطْعَمًا، مَاذَا تُقَدِّمُ فِيهِ؟</a:t>
@@ -20204,6 +20361,7 @@
                   <a:srgbClr val="D4AF37"/>
                 </a:solidFill>
                 <a:latin typeface="Amiri" pitchFamily="2" charset="-78"/>
+                <a:ea typeface="Amiri" pitchFamily="2" charset="-78"/>
                 <a:cs typeface="Amiri" pitchFamily="2" charset="-78"/>
               </a:rPr>
               <a:t>م</a:t>
@@ -20524,6 +20682,7 @@
                   <a:srgbClr val="8A6D1E"/>
                 </a:solidFill>
                 <a:latin typeface="Amiri" pitchFamily="2" charset="-78"/>
+                <a:ea typeface="Amiri" pitchFamily="2" charset="-78"/>
                 <a:cs typeface="Amiri" pitchFamily="2" charset="-78"/>
               </a:rPr>
               <a:t>آدَابُ الصَّفِّ</a:t>
@@ -22055,6 +22214,7 @@
                   <a:srgbClr val="D4AF37"/>
                 </a:solidFill>
                 <a:latin typeface="Amiri" pitchFamily="2" charset="-78"/>
+                <a:ea typeface="Amiri" pitchFamily="2" charset="-78"/>
                 <a:cs typeface="Amiri" pitchFamily="2" charset="-78"/>
               </a:rPr>
               <a:t>م</a:t>
@@ -22375,6 +22535,7 @@
                   <a:srgbClr val="8A6D1E"/>
                 </a:solidFill>
                 <a:latin typeface="Amiri" pitchFamily="2" charset="-78"/>
+                <a:ea typeface="Amiri" pitchFamily="2" charset="-78"/>
                 <a:cs typeface="Amiri" pitchFamily="2" charset="-78"/>
               </a:rPr>
               <a:t>نَمُوذَجُ الإِجَابَةِ</a:t>
@@ -22617,6 +22778,7 @@
                   <a:srgbClr val="1B3B6F"/>
                 </a:solidFill>
                 <a:latin typeface="Amiri" pitchFamily="2" charset="-78"/>
+                <a:ea typeface="Amiri" pitchFamily="2" charset="-78"/>
                 <a:cs typeface="Amiri" pitchFamily="2" charset="-78"/>
               </a:rPr>
               <a:t>آكُلُ الخُبْزَ وَالبَيْضَ فِي الفُطُورِ.</a:t>
@@ -22693,6 +22855,7 @@
                   <a:srgbClr val="1B3B6F"/>
                 </a:solidFill>
                 <a:latin typeface="Amiri" pitchFamily="2" charset="-78"/>
+                <a:ea typeface="Amiri" pitchFamily="2" charset="-78"/>
                 <a:cs typeface="Amiri" pitchFamily="2" charset="-78"/>
               </a:rPr>
               <a:t>مَاذَا تَأْكُلُ فِي الفُطُورِ؟</a:t>
@@ -22796,6 +22959,7 @@
                   <a:srgbClr val="1B3B6F"/>
                 </a:solidFill>
                 <a:latin typeface="Amiri" pitchFamily="2" charset="-78"/>
+                <a:ea typeface="Amiri" pitchFamily="2" charset="-78"/>
                 <a:cs typeface="Amiri" pitchFamily="2" charset="-78"/>
               </a:rPr>
               <a:t>طَعَامِي المُفَضَّلُ هُوَ البِيتْزَا.</a:t>
@@ -22872,6 +23036,7 @@
                   <a:srgbClr val="1B3B6F"/>
                 </a:solidFill>
                 <a:latin typeface="Amiri" pitchFamily="2" charset="-78"/>
+                <a:ea typeface="Amiri" pitchFamily="2" charset="-78"/>
                 <a:cs typeface="Amiri" pitchFamily="2" charset="-78"/>
               </a:rPr>
               <a:t>مَا طَعَامُكَ المُفَضَّلُ؟</a:t>
@@ -22975,6 +23140,7 @@
                   <a:srgbClr val="1B3B6F"/>
                 </a:solidFill>
                 <a:latin typeface="Amiri" pitchFamily="2" charset="-78"/>
+                <a:ea typeface="Amiri" pitchFamily="2" charset="-78"/>
                 <a:cs typeface="Amiri" pitchFamily="2" charset="-78"/>
               </a:rPr>
               <a:t>أَشْرَبُ المَاءَ وَالحَلِيبَ عَادَةً.</a:t>
@@ -23051,6 +23217,7 @@
                   <a:srgbClr val="1B3B6F"/>
                 </a:solidFill>
                 <a:latin typeface="Amiri" pitchFamily="2" charset="-78"/>
+                <a:ea typeface="Amiri" pitchFamily="2" charset="-78"/>
                 <a:cs typeface="Amiri" pitchFamily="2" charset="-78"/>
               </a:rPr>
               <a:t>مَاذَا تَشْرَبُ عَادَةً؟</a:t>
@@ -23154,6 +23321,7 @@
                   <a:srgbClr val="1B3B6F"/>
                 </a:solidFill>
                 <a:latin typeface="Amiri" pitchFamily="2" charset="-78"/>
+                <a:ea typeface="Amiri" pitchFamily="2" charset="-78"/>
                 <a:cs typeface="Amiri" pitchFamily="2" charset="-78"/>
               </a:rPr>
               <a:t>نَعَمْ، أُحِبُّ الجَزَرَ وَالخِيَارَ.</a:t>
@@ -23230,6 +23398,7 @@
                   <a:srgbClr val="1B3B6F"/>
                 </a:solidFill>
                 <a:latin typeface="Amiri" pitchFamily="2" charset="-78"/>
+                <a:ea typeface="Amiri" pitchFamily="2" charset="-78"/>
                 <a:cs typeface="Amiri" pitchFamily="2" charset="-78"/>
               </a:rPr>
               <a:t>هَلْ تُحِبُّ الخُضَارَ؟</a:t>
@@ -23333,6 +23502,7 @@
                   <a:srgbClr val="1B3B6F"/>
                 </a:solidFill>
                 <a:latin typeface="Amiri" pitchFamily="2" charset="-78"/>
+                <a:ea typeface="Amiri" pitchFamily="2" charset="-78"/>
                 <a:cs typeface="Amiri" pitchFamily="2" charset="-78"/>
               </a:rPr>
               <a:t>أَتَنَاوَلُ الغَدَاءَ فِي مَقْصَفِ المَدْرَسَةِ.</a:t>
@@ -23409,6 +23579,7 @@
                   <a:srgbClr val="1B3B6F"/>
                 </a:solidFill>
                 <a:latin typeface="Amiri" pitchFamily="2" charset="-78"/>
+                <a:ea typeface="Amiri" pitchFamily="2" charset="-78"/>
                 <a:cs typeface="Amiri" pitchFamily="2" charset="-78"/>
               </a:rPr>
               <a:t>أَيْنَ تَتَنَاوَلُ الغَدَاءَ؟</a:t>
@@ -23618,6 +23789,7 @@
                   <a:srgbClr val="D4AF37"/>
                 </a:solidFill>
                 <a:latin typeface="Amiri" pitchFamily="2" charset="-78"/>
+                <a:ea typeface="Amiri" pitchFamily="2" charset="-78"/>
                 <a:cs typeface="Amiri" pitchFamily="2" charset="-78"/>
               </a:rPr>
               <a:t>م</a:t>
@@ -23938,6 +24110,7 @@
                   <a:srgbClr val="8A6D1E"/>
                 </a:solidFill>
                 <a:latin typeface="Amiri" pitchFamily="2" charset="-78"/>
+                <a:ea typeface="Amiri" pitchFamily="2" charset="-78"/>
                 <a:cs typeface="Amiri" pitchFamily="2" charset="-78"/>
               </a:rPr>
               <a:t>نَمُوذَجُ الإِجَابَةِ</a:t>
@@ -24180,6 +24353,7 @@
                   <a:srgbClr val="1B3B6F"/>
                 </a:solidFill>
                 <a:latin typeface="Amiri" pitchFamily="2" charset="-78"/>
+                <a:ea typeface="Amiri" pitchFamily="2" charset="-78"/>
                 <a:cs typeface="Amiri" pitchFamily="2" charset="-78"/>
               </a:rPr>
               <a:t>نَتَنَاوَلُ العَشَاءَ فِي السَّابِعَةِ؛ عَادَةً نَأْكُلُ الأُرْزَ وَالدَّجَاجَ وَالسَّلَطَةَ، ثُمَّ نَأْكُلُ الفَاكِهَةَ.</a:t>
@@ -24256,6 +24430,7 @@
                   <a:srgbClr val="1B3B6F"/>
                 </a:solidFill>
                 <a:latin typeface="Amiri" pitchFamily="2" charset="-78"/>
+                <a:ea typeface="Amiri" pitchFamily="2" charset="-78"/>
                 <a:cs typeface="Amiri" pitchFamily="2" charset="-78"/>
               </a:rPr>
               <a:t>صِفْ وَجْبَةَ العَشَاءِ فِي بَيْتِكَ.</a:t>
@@ -24359,6 +24534,7 @@
                   <a:srgbClr val="1B3B6F"/>
                 </a:solidFill>
                 <a:latin typeface="Amiri" pitchFamily="2" charset="-78"/>
+                <a:ea typeface="Amiri" pitchFamily="2" charset="-78"/>
                 <a:cs typeface="Amiri" pitchFamily="2" charset="-78"/>
               </a:rPr>
               <a:t>لَا أُحِبُّ السَّمَكَ، لِأَنَّ رَائِحَتَهُ قَوِيَّةٌ.</a:t>
@@ -24435,6 +24611,7 @@
                   <a:srgbClr val="1B3B6F"/>
                 </a:solidFill>
                 <a:latin typeface="Amiri" pitchFamily="2" charset="-78"/>
+                <a:ea typeface="Amiri" pitchFamily="2" charset="-78"/>
                 <a:cs typeface="Amiri" pitchFamily="2" charset="-78"/>
               </a:rPr>
               <a:t>مَا الطَّعَامُ الَّذِي لَا تُحِبُّهُ؟ لِمَاذَا؟</a:t>
@@ -24538,6 +24715,7 @@
                   <a:srgbClr val="1B3B6F"/>
                 </a:solidFill>
                 <a:latin typeface="Amiri" pitchFamily="2" charset="-78"/>
+                <a:ea typeface="Amiri" pitchFamily="2" charset="-78"/>
                 <a:cs typeface="Amiri" pitchFamily="2" charset="-78"/>
               </a:rPr>
               <a:t>تَطْبُخُ أُمِّي غَالِبًا، وَأَحْيَانًا يَطْبُخُ أَبِي فِي نِهَايَةِ الأُسْبُوعِ.</a:t>
@@ -24614,6 +24792,7 @@
                   <a:srgbClr val="1B3B6F"/>
                 </a:solidFill>
                 <a:latin typeface="Amiri" pitchFamily="2" charset="-78"/>
+                <a:ea typeface="Amiri" pitchFamily="2" charset="-78"/>
                 <a:cs typeface="Amiri" pitchFamily="2" charset="-78"/>
               </a:rPr>
               <a:t>مَنْ يَطْبُخُ فِي بَيْتِكَ؟</a:t>
@@ -24717,6 +24896,7 @@
                   <a:srgbClr val="1B3B6F"/>
                 </a:solidFill>
                 <a:latin typeface="Amiri" pitchFamily="2" charset="-78"/>
+                <a:ea typeface="Amiri" pitchFamily="2" charset="-78"/>
                 <a:cs typeface="Amiri" pitchFamily="2" charset="-78"/>
               </a:rPr>
               <a:t>أَمْسِ أَكَلْتُ مَعْكَرُونَةً بِالطَّمَاطِمِ فِي الغَدَاءِ، وَشُورْبَةَ عَدَسٍ فِي العَشَاءِ.</a:t>
@@ -24793,6 +24973,7 @@
                   <a:srgbClr val="1B3B6F"/>
                 </a:solidFill>
                 <a:latin typeface="Amiri" pitchFamily="2" charset="-78"/>
+                <a:ea typeface="Amiri" pitchFamily="2" charset="-78"/>
                 <a:cs typeface="Amiri" pitchFamily="2" charset="-78"/>
               </a:rPr>
               <a:t>مَاذَا أَكَلْتَ أَمْسِ؟</a:t>
@@ -24896,6 +25077,7 @@
                   <a:srgbClr val="1B3B6F"/>
                 </a:solidFill>
                 <a:latin typeface="Amiri" pitchFamily="2" charset="-78"/>
+                <a:ea typeface="Amiri" pitchFamily="2" charset="-78"/>
                 <a:cs typeface="Amiri" pitchFamily="2" charset="-78"/>
               </a:rPr>
               <a:t>أُرِيدُ أَنْ أَتَعَلَّمَ طَبْخَ البِرْيَانِي، لِأَنَّهُ طَبَقُ أُسْرَتِي المُفَضَّلُ.</a:t>
@@ -24972,6 +25154,7 @@
                   <a:srgbClr val="1B3B6F"/>
                 </a:solidFill>
                 <a:latin typeface="Amiri" pitchFamily="2" charset="-78"/>
+                <a:ea typeface="Amiri" pitchFamily="2" charset="-78"/>
                 <a:cs typeface="Amiri" pitchFamily="2" charset="-78"/>
               </a:rPr>
               <a:t>مَا الأَكْلَةُ الَّتِي تُرِيدُ أَنْ تَتَعَلَّمَ طَبْخَهَا؟</a:t>
@@ -25181,6 +25364,7 @@
                   <a:srgbClr val="D4AF37"/>
                 </a:solidFill>
                 <a:latin typeface="Amiri" pitchFamily="2" charset="-78"/>
+                <a:ea typeface="Amiri" pitchFamily="2" charset="-78"/>
                 <a:cs typeface="Amiri" pitchFamily="2" charset="-78"/>
               </a:rPr>
               <a:t>م</a:t>
@@ -25501,6 +25685,7 @@
                   <a:srgbClr val="8A6D1E"/>
                 </a:solidFill>
                 <a:latin typeface="Amiri" pitchFamily="2" charset="-78"/>
+                <a:ea typeface="Amiri" pitchFamily="2" charset="-78"/>
                 <a:cs typeface="Amiri" pitchFamily="2" charset="-78"/>
               </a:rPr>
               <a:t>نَمُوذَجُ الإِجَابَةِ</a:t>
@@ -25743,6 +25928,7 @@
                   <a:srgbClr val="1B3B6F"/>
                 </a:solidFill>
                 <a:latin typeface="Amiri" pitchFamily="2" charset="-78"/>
+                <a:ea typeface="Amiri" pitchFamily="2" charset="-78"/>
                 <a:cs typeface="Amiri" pitchFamily="2" charset="-78"/>
               </a:rPr>
               <a:t>نَعَمْ، نَأْكُلُ مَعًا كُلَّ مَسَاءٍ، وَهٰذَا مُهِمٌّ لِأَنَّنَا نَتَحَدَّثُ عَنْ يَوْمِنَا وَنَشْعُرُ بِالقُرْبِ.</a:t>
@@ -25819,6 +26005,7 @@
                   <a:srgbClr val="1B3B6F"/>
                 </a:solidFill>
                 <a:latin typeface="Amiri" pitchFamily="2" charset="-78"/>
+                <a:ea typeface="Amiri" pitchFamily="2" charset="-78"/>
                 <a:cs typeface="Amiri" pitchFamily="2" charset="-78"/>
               </a:rPr>
               <a:t>هَلْ تَأْكُلُ أُسْرَتُكَ مَعًا؟ مَا أَهَمِّيَّةُ ذٰلِكَ؟</a:t>
@@ -25922,6 +26109,7 @@
                   <a:srgbClr val="1B3B6F"/>
                 </a:solidFill>
                 <a:latin typeface="Amiri" pitchFamily="2" charset="-78"/>
+                <a:ea typeface="Amiri" pitchFamily="2" charset="-78"/>
                 <a:cs typeface="Amiri" pitchFamily="2" charset="-78"/>
               </a:rPr>
               <a:t>فِي المَاضِي كَانَ النَّاسُ يَطْبُخُونَ فِي البَيْتِ دَائِمًا، أَمَّا اليَوْمَ فَيَطْلُبُونَ الوَجَبَاتِ السَّرِيعَةَ كَثِيرًا.</a:t>
@@ -25998,6 +26186,7 @@
                   <a:srgbClr val="1B3B6F"/>
                 </a:solidFill>
                 <a:latin typeface="Amiri" pitchFamily="2" charset="-78"/>
+                <a:ea typeface="Amiri" pitchFamily="2" charset="-78"/>
                 <a:cs typeface="Amiri" pitchFamily="2" charset="-78"/>
               </a:rPr>
               <a:t>كَيْفَ تَغَيَّرَتْ عَادَاتُ الأَكْلِ فِي رَأْيِكَ؟</a:t>
@@ -26101,6 +26290,7 @@
                   <a:srgbClr val="1B3B6F"/>
                 </a:solidFill>
                 <a:latin typeface="Amiri" pitchFamily="2" charset="-78"/>
+                <a:ea typeface="Amiri" pitchFamily="2" charset="-78"/>
                 <a:cs typeface="Amiri" pitchFamily="2" charset="-78"/>
               </a:rPr>
               <a:t>الكُسْكُسِي أَكْلَةٌ مَغْرِبِيَّةٌ مَشْهُورَةٌ، تُطْبَخُ بِالخُضَارِ وَاللَّحْمِ، وَنَأْكُلُهَا يَوْمَ الجُمُعَةِ عَادَةً.</a:t>
@@ -26177,6 +26367,7 @@
                   <a:srgbClr val="1B3B6F"/>
                 </a:solidFill>
                 <a:latin typeface="Amiri" pitchFamily="2" charset="-78"/>
+                <a:ea typeface="Amiri" pitchFamily="2" charset="-78"/>
                 <a:cs typeface="Amiri" pitchFamily="2" charset="-78"/>
               </a:rPr>
               <a:t>صِفْ أَكْلَةً تَقْلِيدِيَّةً مِنْ بَلَدِ أُسْرَتِكَ.</a:t>
@@ -26386,6 +26577,7 @@
                   <a:srgbClr val="D4AF37"/>
                 </a:solidFill>
                 <a:latin typeface="Amiri" pitchFamily="2" charset="-78"/>
+                <a:ea typeface="Amiri" pitchFamily="2" charset="-78"/>
                 <a:cs typeface="Amiri" pitchFamily="2" charset="-78"/>
               </a:rPr>
               <a:t>م</a:t>
@@ -26706,6 +26898,7 @@
                   <a:srgbClr val="8A6D1E"/>
                 </a:solidFill>
                 <a:latin typeface="Amiri" pitchFamily="2" charset="-78"/>
+                <a:ea typeface="Amiri" pitchFamily="2" charset="-78"/>
                 <a:cs typeface="Amiri" pitchFamily="2" charset="-78"/>
               </a:rPr>
               <a:t>نَمُوذَجُ الإِجَابَةِ</a:t>
@@ -26948,6 +27141,7 @@
                   <a:srgbClr val="1B3B6F"/>
                 </a:solidFill>
                 <a:latin typeface="Amiri" pitchFamily="2" charset="-78"/>
+                <a:ea typeface="Amiri" pitchFamily="2" charset="-78"/>
                 <a:cs typeface="Amiri" pitchFamily="2" charset="-78"/>
               </a:rPr>
               <a:t>أَجْمَلُ وَجْبَةٍ أَتَذَكَّرُهَا كَانَتْ فِي مَطْعَمٍ عَلَى البَحْرِ؛ أَكَلْنَا سَمَكًا مَشْوِيًّا وَضَحِكْنَا كَثِيرًا.</a:t>
@@ -27024,6 +27218,7 @@
                   <a:srgbClr val="1B3B6F"/>
                 </a:solidFill>
                 <a:latin typeface="Amiri" pitchFamily="2" charset="-78"/>
+                <a:ea typeface="Amiri" pitchFamily="2" charset="-78"/>
                 <a:cs typeface="Amiri" pitchFamily="2" charset="-78"/>
               </a:rPr>
               <a:t>مَا أَجْمَلُ وَجْبَةٍ تَتَذَكَّرُهَا؟</a:t>
@@ -27127,6 +27322,7 @@
                   <a:srgbClr val="1B3B6F"/>
                 </a:solidFill>
                 <a:latin typeface="Amiri" pitchFamily="2" charset="-78"/>
+                <a:ea typeface="Amiri" pitchFamily="2" charset="-78"/>
                 <a:cs typeface="Amiri" pitchFamily="2" charset="-78"/>
               </a:rPr>
               <a:t>لَوْ فَتَحْتُ مَطْعَمًا، لَقَدَّمْتُ أَطْبَاقًا مِنْ بُلْدَانٍ مُخْتَلِفَةٍ، لِكَيْ يَتَعَرَّفَ النَّاسُ عَلَى ثَقَافَاتٍ جَدِيدَةٍ.</a:t>
@@ -27203,6 +27399,7 @@
                   <a:srgbClr val="1B3B6F"/>
                 </a:solidFill>
                 <a:latin typeface="Amiri" pitchFamily="2" charset="-78"/>
+                <a:ea typeface="Amiri" pitchFamily="2" charset="-78"/>
                 <a:cs typeface="Amiri" pitchFamily="2" charset="-78"/>
               </a:rPr>
               <a:t>لَوْ فَتَحْتَ مَطْعَمًا، مَاذَا تُقَدِّمُ فِيهِ؟</a:t>
@@ -27412,6 +27609,7 @@
                   <a:srgbClr val="D4AF37"/>
                 </a:solidFill>
                 <a:latin typeface="Amiri" pitchFamily="2" charset="-78"/>
+                <a:ea typeface="Amiri" pitchFamily="2" charset="-78"/>
                 <a:cs typeface="Amiri" pitchFamily="2" charset="-78"/>
               </a:rPr>
               <a:t>م</a:t>
@@ -27732,6 +27930,7 @@
                   <a:srgbClr val="8A6D1E"/>
                 </a:solidFill>
                 <a:latin typeface="Amiri" pitchFamily="2" charset="-78"/>
+                <a:ea typeface="Amiri" pitchFamily="2" charset="-78"/>
                 <a:cs typeface="Amiri" pitchFamily="2" charset="-78"/>
               </a:rPr>
               <a:t>قَيِّمْ عَمَلَكَ</a:t>
@@ -28976,6 +29175,7 @@
                   <a:srgbClr val="FFFFFF"/>
                 </a:solidFill>
                 <a:latin typeface="Amiri" pitchFamily="2" charset="-78"/>
+                <a:ea typeface="Amiri" pitchFamily="2" charset="-78"/>
                 <a:cs typeface="Amiri" pitchFamily="2" charset="-78"/>
               </a:rPr>
               <a:t>أَحْسَنْتُمْ! إِلَى اللِّقَاءِ</a:t>
@@ -29128,6 +29328,7 @@
                   <a:srgbClr val="D4AF37"/>
                 </a:solidFill>
                 <a:latin typeface="Amiri" pitchFamily="2" charset="-78"/>
+                <a:ea typeface="Amiri" pitchFamily="2" charset="-78"/>
                 <a:cs typeface="Amiri" pitchFamily="2" charset="-78"/>
               </a:rPr>
               <a:t>وَرْشَةُ الكِتَابَةِ</a:t>
@@ -29261,6 +29462,7 @@
                   <a:srgbClr val="D4AF37"/>
                 </a:solidFill>
                 <a:latin typeface="Amiri" pitchFamily="2" charset="-78"/>
+                <a:ea typeface="Amiri" pitchFamily="2" charset="-78"/>
                 <a:cs typeface="Amiri" pitchFamily="2" charset="-78"/>
               </a:rPr>
               <a:t>م</a:t>
@@ -29581,6 +29783,7 @@
                   <a:srgbClr val="8A6D1E"/>
                 </a:solidFill>
                 <a:latin typeface="Amiri" pitchFamily="2" charset="-78"/>
+                <a:ea typeface="Amiri" pitchFamily="2" charset="-78"/>
                 <a:cs typeface="Amiri" pitchFamily="2" charset="-78"/>
               </a:rPr>
               <a:t>خَرِيطَةُ الوَرْشَةِ</a:t>
@@ -29895,6 +30098,7 @@
                   <a:srgbClr val="1B3B6F"/>
                 </a:solidFill>
                 <a:latin typeface="Amiri" pitchFamily="2" charset="-78"/>
+                <a:ea typeface="Amiri" pitchFamily="2" charset="-78"/>
                 <a:cs typeface="Amiri" pitchFamily="2" charset="-78"/>
               </a:rPr>
               <a:t>كَيْفَ</a:t>
@@ -30171,6 +30375,7 @@
                   <a:srgbClr val="1E6B52"/>
                 </a:solidFill>
                 <a:latin typeface="Amiri" pitchFamily="2" charset="-78"/>
+                <a:ea typeface="Amiri" pitchFamily="2" charset="-78"/>
                 <a:cs typeface="Amiri" pitchFamily="2" charset="-78"/>
               </a:rPr>
               <a:t>تَمْثِيلُ الدَّوْرِ</a:t>
@@ -30447,6 +30652,7 @@
                   <a:srgbClr val="8A6D1E"/>
                 </a:solidFill>
                 <a:latin typeface="Amiri" pitchFamily="2" charset="-78"/>
+                <a:ea typeface="Amiri" pitchFamily="2" charset="-78"/>
                 <a:cs typeface="Amiri" pitchFamily="2" charset="-78"/>
               </a:rPr>
               <a:t>النَّمُوذَجُ</a:t>
@@ -30723,6 +30929,7 @@
                   <a:srgbClr val="1E6B52"/>
                 </a:solidFill>
                 <a:latin typeface="Amiri" pitchFamily="2" charset="-78"/>
+                <a:ea typeface="Amiri" pitchFamily="2" charset="-78"/>
                 <a:cs typeface="Amiri" pitchFamily="2" charset="-78"/>
               </a:rPr>
               <a:t>المُحَادَثَةُ</a:t>
@@ -30999,6 +31206,7 @@
                   <a:srgbClr val="8A6D1E"/>
                 </a:solidFill>
                 <a:latin typeface="Amiri" pitchFamily="2" charset="-78"/>
+                <a:ea typeface="Amiri" pitchFamily="2" charset="-78"/>
                 <a:cs typeface="Amiri" pitchFamily="2" charset="-78"/>
               </a:rPr>
               <a:t>قَيِّمْ</a:t>
@@ -31242,6 +31450,7 @@
                   <a:srgbClr val="D4AF37"/>
                 </a:solidFill>
                 <a:latin typeface="Amiri" pitchFamily="2" charset="-78"/>
+                <a:ea typeface="Amiri" pitchFamily="2" charset="-78"/>
                 <a:cs typeface="Amiri" pitchFamily="2" charset="-78"/>
               </a:rPr>
               <a:t>م</a:t>
@@ -31562,6 +31771,7 @@
                   <a:srgbClr val="8A6D1E"/>
                 </a:solidFill>
                 <a:latin typeface="Amiri" pitchFamily="2" charset="-78"/>
+                <a:ea typeface="Amiri" pitchFamily="2" charset="-78"/>
                 <a:cs typeface="Amiri" pitchFamily="2" charset="-78"/>
               </a:rPr>
               <a:t>امْتِحَانُ التَّحَدُّثِ</a:t>
@@ -32186,6 +32396,7 @@
                   <a:srgbClr val="1B3B6F"/>
                 </a:solidFill>
                 <a:latin typeface="Amiri" pitchFamily="2" charset="-78"/>
+                <a:ea typeface="Amiri" pitchFamily="2" charset="-78"/>
                 <a:cs typeface="Amiri" pitchFamily="2" charset="-78"/>
               </a:rPr>
               <a:t>عَفْوًا، هَلْ يُمْكِنُ أَنْ تُعِيدَ السُّؤَالَ؟</a:t>
@@ -32285,6 +32496,7 @@
                   <a:srgbClr val="1B3B6F"/>
                 </a:solidFill>
                 <a:latin typeface="Amiri" pitchFamily="2" charset="-78"/>
+                <a:ea typeface="Amiri" pitchFamily="2" charset="-78"/>
                 <a:cs typeface="Amiri" pitchFamily="2" charset="-78"/>
               </a:rPr>
               <a:t>لَحْظَةً، دَعْنِي أُفَكِّرُ …</a:t>
@@ -32384,6 +32596,7 @@
                   <a:srgbClr val="1B3B6F"/>
                 </a:solidFill>
                 <a:latin typeface="Amiri" pitchFamily="2" charset="-78"/>
+                <a:ea typeface="Amiri" pitchFamily="2" charset="-78"/>
                 <a:cs typeface="Amiri" pitchFamily="2" charset="-78"/>
               </a:rPr>
               <a:t>أَقْصِدُ …</a:t>
@@ -32555,6 +32768,7 @@
                   <a:srgbClr val="D4AF37"/>
                 </a:solidFill>
                 <a:latin typeface="Amiri" pitchFamily="2" charset="-78"/>
+                <a:ea typeface="Amiri" pitchFamily="2" charset="-78"/>
                 <a:cs typeface="Amiri" pitchFamily="2" charset="-78"/>
               </a:rPr>
               <a:t>م</a:t>
@@ -32875,6 +33089,7 @@
                   <a:srgbClr val="8A6D1E"/>
                 </a:solidFill>
                 <a:latin typeface="Amiri" pitchFamily="2" charset="-78"/>
+                <a:ea typeface="Amiri" pitchFamily="2" charset="-78"/>
                 <a:cs typeface="Amiri" pitchFamily="2" charset="-78"/>
               </a:rPr>
               <a:t>أَفْعَالُ الطَّعَامِ</a:t>
@@ -33178,6 +33393,7 @@
                   <a:srgbClr val="1B3B6F"/>
                 </a:solidFill>
                 <a:latin typeface="Amiri" pitchFamily="2" charset="-78"/>
+                <a:ea typeface="Amiri" pitchFamily="2" charset="-78"/>
                 <a:cs typeface="Amiri" pitchFamily="2" charset="-78"/>
               </a:rPr>
               <a:t>آكُلُ</a:t>
@@ -33335,6 +33551,7 @@
                   <a:srgbClr val="1B3B6F"/>
                 </a:solidFill>
                 <a:latin typeface="Amiri" pitchFamily="2" charset="-78"/>
+                <a:ea typeface="Amiri" pitchFamily="2" charset="-78"/>
                 <a:cs typeface="Amiri" pitchFamily="2" charset="-78"/>
               </a:rPr>
               <a:t>يَأْكُلُونَ</a:t>
@@ -33438,6 +33655,7 @@
                   <a:srgbClr val="1B3B6F"/>
                 </a:solidFill>
                 <a:latin typeface="Amiri" pitchFamily="2" charset="-78"/>
+                <a:ea typeface="Amiri" pitchFamily="2" charset="-78"/>
                 <a:cs typeface="Amiri" pitchFamily="2" charset="-78"/>
               </a:rPr>
               <a:t>تَأْكُلُ</a:t>
@@ -33541,6 +33759,7 @@
                   <a:srgbClr val="1B3B6F"/>
                 </a:solidFill>
                 <a:latin typeface="Amiri" pitchFamily="2" charset="-78"/>
+                <a:ea typeface="Amiri" pitchFamily="2" charset="-78"/>
                 <a:cs typeface="Amiri" pitchFamily="2" charset="-78"/>
               </a:rPr>
               <a:t>يَأْكُلُ</a:t>
@@ -33806,6 +34025,7 @@
                   <a:srgbClr val="1B3B6F"/>
                 </a:solidFill>
                 <a:latin typeface="Amiri" pitchFamily="2" charset="-78"/>
+                <a:ea typeface="Amiri" pitchFamily="2" charset="-78"/>
                 <a:cs typeface="Amiri" pitchFamily="2" charset="-78"/>
               </a:rPr>
               <a:t>أَشْرَبُ</a:t>
@@ -33963,6 +34183,7 @@
                   <a:srgbClr val="1B3B6F"/>
                 </a:solidFill>
                 <a:latin typeface="Amiri" pitchFamily="2" charset="-78"/>
+                <a:ea typeface="Amiri" pitchFamily="2" charset="-78"/>
                 <a:cs typeface="Amiri" pitchFamily="2" charset="-78"/>
               </a:rPr>
               <a:t>يَشْرَبُونَ</a:t>
@@ -34066,6 +34287,7 @@
                   <a:srgbClr val="1B3B6F"/>
                 </a:solidFill>
                 <a:latin typeface="Amiri" pitchFamily="2" charset="-78"/>
+                <a:ea typeface="Amiri" pitchFamily="2" charset="-78"/>
                 <a:cs typeface="Amiri" pitchFamily="2" charset="-78"/>
               </a:rPr>
               <a:t>تَشْرَبُ</a:t>
@@ -34169,6 +34391,7 @@
                   <a:srgbClr val="1B3B6F"/>
                 </a:solidFill>
                 <a:latin typeface="Amiri" pitchFamily="2" charset="-78"/>
+                <a:ea typeface="Amiri" pitchFamily="2" charset="-78"/>
                 <a:cs typeface="Amiri" pitchFamily="2" charset="-78"/>
               </a:rPr>
               <a:t>يَشْرَبُ</a:t>
@@ -34434,6 +34657,7 @@
                   <a:srgbClr val="1B3B6F"/>
                 </a:solidFill>
                 <a:latin typeface="Amiri" pitchFamily="2" charset="-78"/>
+                <a:ea typeface="Amiri" pitchFamily="2" charset="-78"/>
                 <a:cs typeface="Amiri" pitchFamily="2" charset="-78"/>
               </a:rPr>
               <a:t>أُفَضِّلُ</a:t>
@@ -34591,6 +34815,7 @@
                   <a:srgbClr val="1B3B6F"/>
                 </a:solidFill>
                 <a:latin typeface="Amiri" pitchFamily="2" charset="-78"/>
+                <a:ea typeface="Amiri" pitchFamily="2" charset="-78"/>
                 <a:cs typeface="Amiri" pitchFamily="2" charset="-78"/>
               </a:rPr>
               <a:t>يُفَضِّلُونَ</a:t>
@@ -34694,6 +34919,7 @@
                   <a:srgbClr val="1B3B6F"/>
                 </a:solidFill>
                 <a:latin typeface="Amiri" pitchFamily="2" charset="-78"/>
+                <a:ea typeface="Amiri" pitchFamily="2" charset="-78"/>
                 <a:cs typeface="Amiri" pitchFamily="2" charset="-78"/>
               </a:rPr>
               <a:t>تُفَضِّلُ</a:t>
@@ -34797,6 +35023,7 @@
                   <a:srgbClr val="1B3B6F"/>
                 </a:solidFill>
                 <a:latin typeface="Amiri" pitchFamily="2" charset="-78"/>
+                <a:ea typeface="Amiri" pitchFamily="2" charset="-78"/>
                 <a:cs typeface="Amiri" pitchFamily="2" charset="-78"/>
               </a:rPr>
               <a:t>يُفَضِّلُ</a:t>
@@ -35062,6 +35289,7 @@
                   <a:srgbClr val="1B3B6F"/>
                 </a:solidFill>
                 <a:latin typeface="Amiri" pitchFamily="2" charset="-78"/>
+                <a:ea typeface="Amiri" pitchFamily="2" charset="-78"/>
                 <a:cs typeface="Amiri" pitchFamily="2" charset="-78"/>
               </a:rPr>
               <a:t>أَطْبُخُ</a:t>
@@ -35219,6 +35447,7 @@
                   <a:srgbClr val="1B3B6F"/>
                 </a:solidFill>
                 <a:latin typeface="Amiri" pitchFamily="2" charset="-78"/>
+                <a:ea typeface="Amiri" pitchFamily="2" charset="-78"/>
                 <a:cs typeface="Amiri" pitchFamily="2" charset="-78"/>
               </a:rPr>
               <a:t>يَطْبُخُونَ</a:t>
@@ -35322,6 +35551,7 @@
                   <a:srgbClr val="1B3B6F"/>
                 </a:solidFill>
                 <a:latin typeface="Amiri" pitchFamily="2" charset="-78"/>
+                <a:ea typeface="Amiri" pitchFamily="2" charset="-78"/>
                 <a:cs typeface="Amiri" pitchFamily="2" charset="-78"/>
               </a:rPr>
               <a:t>تَطْبُخُ</a:t>
@@ -35425,6 +35655,7 @@
                   <a:srgbClr val="1B3B6F"/>
                 </a:solidFill>
                 <a:latin typeface="Amiri" pitchFamily="2" charset="-78"/>
+                <a:ea typeface="Amiri" pitchFamily="2" charset="-78"/>
                 <a:cs typeface="Amiri" pitchFamily="2" charset="-78"/>
               </a:rPr>
               <a:t>يَطْبُخُ</a:t>
@@ -35690,6 +35921,7 @@
                   <a:srgbClr val="1B3B6F"/>
                 </a:solidFill>
                 <a:latin typeface="Amiri" pitchFamily="2" charset="-78"/>
+                <a:ea typeface="Amiri" pitchFamily="2" charset="-78"/>
                 <a:cs typeface="Amiri" pitchFamily="2" charset="-78"/>
               </a:rPr>
               <a:t>وَجْبَةٌ</a:t>
@@ -35847,6 +36079,7 @@
                   <a:srgbClr val="1B3B6F"/>
                 </a:solidFill>
                 <a:latin typeface="Amiri" pitchFamily="2" charset="-78"/>
+                <a:ea typeface="Amiri" pitchFamily="2" charset="-78"/>
                 <a:cs typeface="Amiri" pitchFamily="2" charset="-78"/>
               </a:rPr>
               <a:t>وَجَبَاتٌ</a:t>
@@ -35950,6 +36183,7 @@
                   <a:srgbClr val="1B3B6F"/>
                 </a:solidFill>
                 <a:latin typeface="Amiri" pitchFamily="2" charset="-78"/>
+                <a:ea typeface="Amiri" pitchFamily="2" charset="-78"/>
                 <a:cs typeface="Amiri" pitchFamily="2" charset="-78"/>
               </a:rPr>
               <a:t>وَجْبَتَانِ</a:t>
@@ -36053,6 +36287,7 @@
                   <a:srgbClr val="1B3B6F"/>
                 </a:solidFill>
                 <a:latin typeface="Amiri" pitchFamily="2" charset="-78"/>
+                <a:ea typeface="Amiri" pitchFamily="2" charset="-78"/>
                 <a:cs typeface="Amiri" pitchFamily="2" charset="-78"/>
               </a:rPr>
               <a:t>وَجْبَةٌ</a:t>
@@ -36318,6 +36553,7 @@
                   <a:srgbClr val="1B3B6F"/>
                 </a:solidFill>
                 <a:latin typeface="Amiri" pitchFamily="2" charset="-78"/>
+                <a:ea typeface="Amiri" pitchFamily="2" charset="-78"/>
                 <a:cs typeface="Amiri" pitchFamily="2" charset="-78"/>
               </a:rPr>
               <a:t>طَبَقٌ</a:t>
@@ -36475,6 +36711,7 @@
                   <a:srgbClr val="1B3B6F"/>
                 </a:solidFill>
                 <a:latin typeface="Amiri" pitchFamily="2" charset="-78"/>
+                <a:ea typeface="Amiri" pitchFamily="2" charset="-78"/>
                 <a:cs typeface="Amiri" pitchFamily="2" charset="-78"/>
               </a:rPr>
               <a:t>أَطْبَاقٌ</a:t>
@@ -36578,6 +36815,7 @@
                   <a:srgbClr val="1B3B6F"/>
                 </a:solidFill>
                 <a:latin typeface="Amiri" pitchFamily="2" charset="-78"/>
+                <a:ea typeface="Amiri" pitchFamily="2" charset="-78"/>
                 <a:cs typeface="Amiri" pitchFamily="2" charset="-78"/>
               </a:rPr>
               <a:t>طَبَقَانِ</a:t>
@@ -36681,6 +36919,7 @@
                   <a:srgbClr val="1B3B6F"/>
                 </a:solidFill>
                 <a:latin typeface="Amiri" pitchFamily="2" charset="-78"/>
+                <a:ea typeface="Amiri" pitchFamily="2" charset="-78"/>
                 <a:cs typeface="Amiri" pitchFamily="2" charset="-78"/>
               </a:rPr>
               <a:t>طَبَقٌ</a:t>
@@ -36814,6 +37053,7 @@
                   <a:srgbClr val="D4AF37"/>
                 </a:solidFill>
                 <a:latin typeface="Amiri" pitchFamily="2" charset="-78"/>
+                <a:ea typeface="Amiri" pitchFamily="2" charset="-78"/>
                 <a:cs typeface="Amiri" pitchFamily="2" charset="-78"/>
               </a:rPr>
               <a:t>م</a:t>
@@ -37134,6 +37374,7 @@
                   <a:srgbClr val="8A6D1E"/>
                 </a:solidFill>
                 <a:latin typeface="Amiri" pitchFamily="2" charset="-78"/>
+                <a:ea typeface="Amiri" pitchFamily="2" charset="-78"/>
                 <a:cs typeface="Amiri" pitchFamily="2" charset="-78"/>
               </a:rPr>
               <a:t>وَصْفُ الطَّعَامِ</a:t>
@@ -37437,6 +37678,7 @@
                   <a:srgbClr val="1B3B6F"/>
                 </a:solidFill>
                 <a:latin typeface="Amiri" pitchFamily="2" charset="-78"/>
+                <a:ea typeface="Amiri" pitchFamily="2" charset="-78"/>
                 <a:cs typeface="Amiri" pitchFamily="2" charset="-78"/>
               </a:rPr>
               <a:t>لَذِيذٌ</a:t>
@@ -37594,6 +37836,7 @@
                   <a:srgbClr val="1B3B6F"/>
                 </a:solidFill>
                 <a:latin typeface="Amiri" pitchFamily="2" charset="-78"/>
+                <a:ea typeface="Amiri" pitchFamily="2" charset="-78"/>
                 <a:cs typeface="Amiri" pitchFamily="2" charset="-78"/>
               </a:rPr>
               <a:t>لَذِيذَةٌ</a:t>
@@ -37697,6 +37940,7 @@
                   <a:srgbClr val="1B3B6F"/>
                 </a:solidFill>
                 <a:latin typeface="Amiri" pitchFamily="2" charset="-78"/>
+                <a:ea typeface="Amiri" pitchFamily="2" charset="-78"/>
                 <a:cs typeface="Amiri" pitchFamily="2" charset="-78"/>
               </a:rPr>
               <a:t>لَذِيذٌ</a:t>
@@ -37962,6 +38206,7 @@
                   <a:srgbClr val="1B3B6F"/>
                 </a:solidFill>
                 <a:latin typeface="Amiri" pitchFamily="2" charset="-78"/>
+                <a:ea typeface="Amiri" pitchFamily="2" charset="-78"/>
                 <a:cs typeface="Amiri" pitchFamily="2" charset="-78"/>
               </a:rPr>
               <a:t>حَارٌّ</a:t>
@@ -38119,6 +38364,7 @@
                   <a:srgbClr val="1B3B6F"/>
                 </a:solidFill>
                 <a:latin typeface="Amiri" pitchFamily="2" charset="-78"/>
+                <a:ea typeface="Amiri" pitchFamily="2" charset="-78"/>
                 <a:cs typeface="Amiri" pitchFamily="2" charset="-78"/>
               </a:rPr>
               <a:t>حَارَّةٌ</a:t>
@@ -38222,6 +38468,7 @@
                   <a:srgbClr val="1B3B6F"/>
                 </a:solidFill>
                 <a:latin typeface="Amiri" pitchFamily="2" charset="-78"/>
+                <a:ea typeface="Amiri" pitchFamily="2" charset="-78"/>
                 <a:cs typeface="Amiri" pitchFamily="2" charset="-78"/>
               </a:rPr>
               <a:t>حَارٌّ</a:t>
@@ -38487,6 +38734,7 @@
                   <a:srgbClr val="1B3B6F"/>
                 </a:solidFill>
                 <a:latin typeface="Amiri" pitchFamily="2" charset="-78"/>
+                <a:ea typeface="Amiri" pitchFamily="2" charset="-78"/>
                 <a:cs typeface="Amiri" pitchFamily="2" charset="-78"/>
               </a:rPr>
               <a:t>صِحِّيٌّ</a:t>
@@ -38644,6 +38892,7 @@
                   <a:srgbClr val="1B3B6F"/>
                 </a:solidFill>
                 <a:latin typeface="Amiri" pitchFamily="2" charset="-78"/>
+                <a:ea typeface="Amiri" pitchFamily="2" charset="-78"/>
                 <a:cs typeface="Amiri" pitchFamily="2" charset="-78"/>
               </a:rPr>
               <a:t>صِحِّيَّةٌ</a:t>
@@ -38747,6 +38996,7 @@
                   <a:srgbClr val="1B3B6F"/>
                 </a:solidFill>
                 <a:latin typeface="Amiri" pitchFamily="2" charset="-78"/>
+                <a:ea typeface="Amiri" pitchFamily="2" charset="-78"/>
                 <a:cs typeface="Amiri" pitchFamily="2" charset="-78"/>
               </a:rPr>
               <a:t>صِحِّيٌّ</a:t>
@@ -39012,6 +39262,7 @@
                   <a:srgbClr val="1B3B6F"/>
                 </a:solidFill>
                 <a:latin typeface="Amiri" pitchFamily="2" charset="-78"/>
+                <a:ea typeface="Amiri" pitchFamily="2" charset="-78"/>
                 <a:cs typeface="Amiri" pitchFamily="2" charset="-78"/>
               </a:rPr>
               <a:t>فَاكِهَةٌ</a:t>
@@ -39169,6 +39420,7 @@
                   <a:srgbClr val="1B3B6F"/>
                 </a:solidFill>
                 <a:latin typeface="Amiri" pitchFamily="2" charset="-78"/>
+                <a:ea typeface="Amiri" pitchFamily="2" charset="-78"/>
                 <a:cs typeface="Amiri" pitchFamily="2" charset="-78"/>
               </a:rPr>
               <a:t>فَوَاكِهُ</a:t>
@@ -39272,6 +39524,7 @@
                   <a:srgbClr val="1B3B6F"/>
                 </a:solidFill>
                 <a:latin typeface="Amiri" pitchFamily="2" charset="-78"/>
+                <a:ea typeface="Amiri" pitchFamily="2" charset="-78"/>
                 <a:cs typeface="Amiri" pitchFamily="2" charset="-78"/>
               </a:rPr>
               <a:t>فَاكِهَةٌ</a:t>
@@ -39537,6 +39790,7 @@
                   <a:srgbClr val="1B3B6F"/>
                 </a:solidFill>
                 <a:latin typeface="Amiri" pitchFamily="2" charset="-78"/>
+                <a:ea typeface="Amiri" pitchFamily="2" charset="-78"/>
                 <a:cs typeface="Amiri" pitchFamily="2" charset="-78"/>
               </a:rPr>
               <a:t>عَصِيرُ البُرْتُقَالِ</a:t>
@@ -39856,6 +40110,7 @@
                   <a:srgbClr val="1B3B6F"/>
                 </a:solidFill>
                 <a:latin typeface="Amiri" pitchFamily="2" charset="-78"/>
+                <a:ea typeface="Amiri" pitchFamily="2" charset="-78"/>
                 <a:cs typeface="Amiri" pitchFamily="2" charset="-78"/>
               </a:rPr>
               <a:t>الفُطُورُ · الغَدَاءُ · العَشَاءُ</a:t>
@@ -40043,6 +40298,7 @@
                   <a:srgbClr val="D4AF37"/>
                 </a:solidFill>
                 <a:latin typeface="Amiri" pitchFamily="2" charset="-78"/>
+                <a:ea typeface="Amiri" pitchFamily="2" charset="-78"/>
                 <a:cs typeface="Amiri" pitchFamily="2" charset="-78"/>
               </a:rPr>
               <a:t>م</a:t>
@@ -40363,6 +40619,7 @@
                   <a:srgbClr val="8A6D1E"/>
                 </a:solidFill>
                 <a:latin typeface="Amiri" pitchFamily="2" charset="-78"/>
+                <a:ea typeface="Amiri" pitchFamily="2" charset="-78"/>
                 <a:cs typeface="Amiri" pitchFamily="2" charset="-78"/>
               </a:rPr>
               <a:t>فِي الغُرَفِ</a:t>
@@ -41539,6 +41796,7 @@
                   <a:srgbClr val="1B3B6F"/>
                 </a:solidFill>
                 <a:latin typeface="Amiri" pitchFamily="2" charset="-78"/>
+                <a:ea typeface="Amiri" pitchFamily="2" charset="-78"/>
                 <a:cs typeface="Amiri" pitchFamily="2" charset="-78"/>
               </a:rPr>
               <a:t>دَوْرُكَ!</a:t>
@@ -41615,6 +41873,7 @@
                   <a:srgbClr val="1B3B6F"/>
                 </a:solidFill>
                 <a:latin typeface="Amiri" pitchFamily="2" charset="-78"/>
+                <a:ea typeface="Amiri" pitchFamily="2" charset="-78"/>
                 <a:cs typeface="Amiri" pitchFamily="2" charset="-78"/>
               </a:rPr>
               <a:t>أَحْسَنْتَ! / أَحْسَنْتِ!</a:t>
@@ -41691,6 +41950,7 @@
                   <a:srgbClr val="1B3B6F"/>
                 </a:solidFill>
                 <a:latin typeface="Amiri" pitchFamily="2" charset="-78"/>
+                <a:ea typeface="Amiri" pitchFamily="2" charset="-78"/>
                 <a:cs typeface="Amiri" pitchFamily="2" charset="-78"/>
               </a:rPr>
               <a:t>تَكَلَّمْ أَكْثَرَ، مِنْ فَضْلِكَ</a:t>
@@ -41767,6 +42027,7 @@
                   <a:srgbClr val="1B3B6F"/>
                 </a:solidFill>
                 <a:latin typeface="Amiri" pitchFamily="2" charset="-78"/>
+                <a:ea typeface="Amiri" pitchFamily="2" charset="-78"/>
                 <a:cs typeface="Amiri" pitchFamily="2" charset="-78"/>
               </a:rPr>
               <a:t>لِمَاذَا؟</a:t>
@@ -41938,6 +42199,7 @@
                   <a:srgbClr val="D4AF37"/>
                 </a:solidFill>
                 <a:latin typeface="Amiri" pitchFamily="2" charset="-78"/>
+                <a:ea typeface="Amiri" pitchFamily="2" charset="-78"/>
                 <a:cs typeface="Amiri" pitchFamily="2" charset="-78"/>
               </a:rPr>
               <a:t>م</a:t>
@@ -42258,6 +42520,7 @@
                   <a:srgbClr val="8A6D1E"/>
                 </a:solidFill>
                 <a:latin typeface="Amiri" pitchFamily="2" charset="-78"/>
+                <a:ea typeface="Amiri" pitchFamily="2" charset="-78"/>
                 <a:cs typeface="Amiri" pitchFamily="2" charset="-78"/>
               </a:rPr>
               <a:t>العَشَاءُ عِنْدَ صَدِيقِي</a:t>
@@ -42538,6 +42801,7 @@
                   <a:srgbClr val="1B3B6F"/>
                 </a:solidFill>
                 <a:latin typeface="Amiri" pitchFamily="2" charset="-78"/>
+                <a:ea typeface="Amiri" pitchFamily="2" charset="-78"/>
                 <a:cs typeface="Amiri" pitchFamily="2" charset="-78"/>
               </a:rPr>
               <a:t>أُحِبُّ … وَ …</a:t>
@@ -42614,6 +42878,7 @@
                   <a:srgbClr val="1B3B6F"/>
                 </a:solidFill>
                 <a:latin typeface="Amiri" pitchFamily="2" charset="-78"/>
+                <a:ea typeface="Amiri" pitchFamily="2" charset="-78"/>
                 <a:cs typeface="Amiri" pitchFamily="2" charset="-78"/>
               </a:rPr>
               <a:t>أَهْلًا بِكَ! مَاذَا تُحِبُّ أَنْ تَأْكُلَ؟</a:t>
@@ -42782,6 +43047,7 @@
                   <a:srgbClr val="1B3B6F"/>
                 </a:solidFill>
                 <a:latin typeface="Amiri" pitchFamily="2" charset="-78"/>
+                <a:ea typeface="Amiri" pitchFamily="2" charset="-78"/>
                 <a:cs typeface="Amiri" pitchFamily="2" charset="-78"/>
               </a:rPr>
               <a:t>لَا، لَا آكُلُ … لٰكِنِّي …</a:t>
@@ -42858,6 +43124,7 @@
                   <a:srgbClr val="1B3B6F"/>
                 </a:solidFill>
                 <a:latin typeface="Amiri" pitchFamily="2" charset="-78"/>
+                <a:ea typeface="Amiri" pitchFamily="2" charset="-78"/>
                 <a:cs typeface="Amiri" pitchFamily="2" charset="-78"/>
               </a:rPr>
               <a:t>هَلْ تَأْكُلُ السَّمَكَ؟</a:t>
@@ -43026,6 +43293,7 @@
                   <a:srgbClr val="1B3B6F"/>
                 </a:solidFill>
                 <a:latin typeface="Amiri" pitchFamily="2" charset="-78"/>
+                <a:ea typeface="Amiri" pitchFamily="2" charset="-78"/>
                 <a:cs typeface="Amiri" pitchFamily="2" charset="-78"/>
               </a:rPr>
               <a:t>أَشْرَبُ …، مِنْ فَضْلِكِ</a:t>
@@ -43102,6 +43370,7 @@
                   <a:srgbClr val="1B3B6F"/>
                 </a:solidFill>
                 <a:latin typeface="Amiri" pitchFamily="2" charset="-78"/>
+                <a:ea typeface="Amiri" pitchFamily="2" charset="-78"/>
                 <a:cs typeface="Amiri" pitchFamily="2" charset="-78"/>
               </a:rPr>
               <a:t>مَاذَا تَشْرَبُ؟</a:t>
@@ -43270,6 +43539,7 @@
                   <a:srgbClr val="1B3B6F"/>
                 </a:solidFill>
                 <a:latin typeface="Amiri" pitchFamily="2" charset="-78"/>
+                <a:ea typeface="Amiri" pitchFamily="2" charset="-78"/>
                 <a:cs typeface="Amiri" pitchFamily="2" charset="-78"/>
               </a:rPr>
               <a:t>فَاكِهَتِي المُفَضَّلَةُ هِيَ …</a:t>
@@ -43346,6 +43616,7 @@
                   <a:srgbClr val="1B3B6F"/>
                 </a:solidFill>
                 <a:latin typeface="Amiri" pitchFamily="2" charset="-78"/>
+                <a:ea typeface="Amiri" pitchFamily="2" charset="-78"/>
                 <a:cs typeface="Amiri" pitchFamily="2" charset="-78"/>
               </a:rPr>
               <a:t>مَا فَاكِهَتُكَ المُفَضَّلَةُ؟</a:t>
@@ -43514,6 +43785,7 @@
                   <a:srgbClr val="1B3B6F"/>
                 </a:solidFill>
                 <a:latin typeface="Amiri" pitchFamily="2" charset="-78"/>
+                <a:ea typeface="Amiri" pitchFamily="2" charset="-78"/>
                 <a:cs typeface="Amiri" pitchFamily="2" charset="-78"/>
               </a:rPr>
               <a:t>نَعَمْ، الطَّعَامُ … جِدًّا</a:t>
@@ -43590,6 +43862,7 @@
                   <a:srgbClr val="1B3B6F"/>
                 </a:solidFill>
                 <a:latin typeface="Amiri" pitchFamily="2" charset="-78"/>
+                <a:ea typeface="Amiri" pitchFamily="2" charset="-78"/>
                 <a:cs typeface="Amiri" pitchFamily="2" charset="-78"/>
               </a:rPr>
               <a:t>هَلْ أَعْجَبَكَ الطَّعَامُ؟</a:t>
@@ -43864,6 +44137,7 @@
                   <a:srgbClr val="D4AF37"/>
                 </a:solidFill>
                 <a:latin typeface="Amiri" pitchFamily="2" charset="-78"/>
+                <a:ea typeface="Amiri" pitchFamily="2" charset="-78"/>
                 <a:cs typeface="Amiri" pitchFamily="2" charset="-78"/>
               </a:rPr>
               <a:t>م</a:t>
@@ -44184,6 +44458,7 @@
                   <a:srgbClr val="8A6D1E"/>
                 </a:solidFill>
                 <a:latin typeface="Amiri" pitchFamily="2" charset="-78"/>
+                <a:ea typeface="Amiri" pitchFamily="2" charset="-78"/>
                 <a:cs typeface="Amiri" pitchFamily="2" charset="-78"/>
               </a:rPr>
               <a:t>مَقْصَفُ المَدْرَسَةِ</a:t>
@@ -44464,6 +44739,7 @@
                   <a:srgbClr val="1B3B6F"/>
                 </a:solidFill>
                 <a:latin typeface="Amiri" pitchFamily="2" charset="-78"/>
+                <a:ea typeface="Amiri" pitchFamily="2" charset="-78"/>
                 <a:cs typeface="Amiri" pitchFamily="2" charset="-78"/>
               </a:rPr>
               <a:t>أَتَنَاوَلُ الغَدَاءَ فِي …</a:t>
@@ -44540,6 +44816,7 @@
                   <a:srgbClr val="1B3B6F"/>
                 </a:solidFill>
                 <a:latin typeface="Amiri" pitchFamily="2" charset="-78"/>
+                <a:ea typeface="Amiri" pitchFamily="2" charset="-78"/>
                 <a:cs typeface="Amiri" pitchFamily="2" charset="-78"/>
               </a:rPr>
               <a:t>فِي أَيِّ سَاعَةٍ تَتَنَاوَلُ الغَدَاءَ؟</a:t>
@@ -44708,6 +44985,7 @@
                   <a:srgbClr val="1B3B6F"/>
                 </a:solidFill>
                 <a:latin typeface="Amiri" pitchFamily="2" charset="-78"/>
+                <a:ea typeface="Amiri" pitchFamily="2" charset="-78"/>
                 <a:cs typeface="Amiri" pitchFamily="2" charset="-78"/>
               </a:rPr>
               <a:t>عَادَةً آكُلُ شَطِيرَةَ …</a:t>
@@ -44784,6 +45062,7 @@
                   <a:srgbClr val="1B3B6F"/>
                 </a:solidFill>
                 <a:latin typeface="Amiri" pitchFamily="2" charset="-78"/>
+                <a:ea typeface="Amiri" pitchFamily="2" charset="-78"/>
                 <a:cs typeface="Amiri" pitchFamily="2" charset="-78"/>
               </a:rPr>
               <a:t>مَاذَا تَأْكُلُ عَادَةً فِي المَقْصَفِ؟</a:t>
@@ -44952,6 +45231,7 @@
                   <a:srgbClr val="1B3B6F"/>
                 </a:solidFill>
                 <a:latin typeface="Amiri" pitchFamily="2" charset="-78"/>
+                <a:ea typeface="Amiri" pitchFamily="2" charset="-78"/>
                 <a:cs typeface="Amiri" pitchFamily="2" charset="-78"/>
               </a:rPr>
               <a:t>… لَذِيذٌ، لٰكِنَّهُ …</a:t>
@@ -45028,6 +45308,7 @@
                   <a:srgbClr val="1B3B6F"/>
                 </a:solidFill>
                 <a:latin typeface="Amiri" pitchFamily="2" charset="-78"/>
+                <a:ea typeface="Amiri" pitchFamily="2" charset="-78"/>
                 <a:cs typeface="Amiri" pitchFamily="2" charset="-78"/>
               </a:rPr>
               <a:t>مَا رَأْيُكَ فِي طَعَامِ المَقْصَفِ؟</a:t>
@@ -45131,6 +45412,7 @@
                   <a:srgbClr val="1B3B6F"/>
                 </a:solidFill>
                 <a:latin typeface="Amiri" pitchFamily="2" charset="-78"/>
+                <a:ea typeface="Amiri" pitchFamily="2" charset="-78"/>
                 <a:cs typeface="Amiri" pitchFamily="2" charset="-78"/>
               </a:rPr>
               <a:t>هَلْ عِنْدَكُمْ أَطْبَاقٌ …؟</a:t>
@@ -45207,6 +45489,7 @@
                   <a:srgbClr val="1B3B6F"/>
                 </a:solidFill>
                 <a:latin typeface="Amiri" pitchFamily="2" charset="-78"/>
+                <a:ea typeface="Amiri" pitchFamily="2" charset="-78"/>
                 <a:cs typeface="Amiri" pitchFamily="2" charset="-78"/>
               </a:rPr>
               <a:t>… نَعَمْ، عِنْدَنَا شُورْبَةُ العَدَسِ كُلَّ يَوْمٍ.</a:t>
@@ -45310,6 +45593,7 @@
                   <a:srgbClr val="1B3B6F"/>
                 </a:solidFill>
                 <a:latin typeface="Amiri" pitchFamily="2" charset="-78"/>
+                <a:ea typeface="Amiri" pitchFamily="2" charset="-78"/>
                 <a:cs typeface="Amiri" pitchFamily="2" charset="-78"/>
               </a:rPr>
               <a:t>أُرِيدُ أَنْ تُضِيفُوا …</a:t>
@@ -45386,6 +45670,7 @@
                   <a:srgbClr val="1B3B6F"/>
                 </a:solidFill>
                 <a:latin typeface="Amiri" pitchFamily="2" charset="-78"/>
+                <a:ea typeface="Amiri" pitchFamily="2" charset="-78"/>
                 <a:cs typeface="Amiri" pitchFamily="2" charset="-78"/>
               </a:rPr>
               <a:t>مَاذَا تُرِيدُ أَنْ نُضِيفَ إِلَى القَائِمَةِ؟</a:t>
@@ -45560,13 +45845,9 @@
     <a:fontScheme name="Office">
       <a:majorFont>
         <a:latin typeface="Calibri Light" panose="020F0302020204030204"/>
-        <a:ea typeface=""/>
-        <a:cs typeface=""/>
-        <a:font script="Jpan" typeface="游ゴシック Light"/>
-        <a:font script="Hang" typeface="맑은 고딕"/>
-        <a:font script="Hans" typeface="等线 Light"/>
-        <a:font script="Hant" typeface="新細明體"/>
-        <a:font script="Arab" typeface="Times New Roman"/>
+        <a:ea typeface="Amiri" pitchFamily="2" charset="-78"/>
+        <a:cs typeface="Amiri" pitchFamily="2" charset="-78"/>
+        <a:font script="Arab" typeface="Amiri"/>
         <a:font script="Hebr" typeface="Times New Roman"/>
         <a:font script="Thai" typeface="Angsana New"/>
         <a:font script="Ethi" typeface="Nyala"/>
@@ -45612,13 +45893,9 @@
       </a:majorFont>
       <a:minorFont>
         <a:latin typeface="Calibri" panose="020F0502020204030204"/>
-        <a:ea typeface=""/>
-        <a:cs typeface=""/>
-        <a:font script="Jpan" typeface="游ゴシック"/>
-        <a:font script="Hang" typeface="맑은 고딕"/>
-        <a:font script="Hans" typeface="等线"/>
-        <a:font script="Hant" typeface="新細明體"/>
-        <a:font script="Arab" typeface="Arial"/>
+        <a:ea typeface="Amiri" pitchFamily="2" charset="-78"/>
+        <a:cs typeface="Amiri" pitchFamily="2" charset="-78"/>
+        <a:font script="Arab" typeface="Amiri"/>
         <a:font script="Hebr" typeface="Arial"/>
         <a:font script="Thai" typeface="Cordia New"/>
         <a:font script="Ethi" typeface="Nyala"/>
